--- a/progetto-snodi/corsi/edu-genai-2/incontri/04-scaffolding-personalizzazione.pptx
+++ b/progetto-snodi/corsi/edu-genai-2/incontri/04-scaffolding-personalizzazione.pptx
@@ -14,9 +14,11 @@
     <p:sldId id="262" r:id="rId8"/>
     <p:sldId id="263" r:id="rId9"/>
     <p:sldId id="264" r:id="rId10"/>
+    <p:sldId id="265" r:id="rId11"/>
+    <p:sldId id="266" r:id="rId12"/>
   </p:sldIdLst>
   <p:notesMasterIdLst>
-    <p:notesMasterId r:id="rId11"/>
+    <p:notesMasterId r:id="rId13"/>
   </p:notesMasterIdLst>
   <p:sldSz cx="12188952" cy="6858000"/>
   <p:notesSz cx="6858000" cy="12188952"/>
@@ -552,6 +554,182 @@
 </p:notes>
 </file>
 
+<file path=ppt/notesSlides/notesSlide10.xml><?xml version="1.0" encoding="utf-8"?>
+<p:notes xmlns:a="http://schemas.openxmlformats.org/drawingml/2006/main" xmlns:r="http://schemas.openxmlformats.org/officeDocument/2006/relationships" xmlns:p="http://schemas.openxmlformats.org/presentationml/2006/main">
+  <p:cSld>
+    <p:spTree>
+      <p:nvGrpSpPr>
+        <p:cNvPr id="1" name=""/>
+        <p:cNvGrpSpPr/>
+        <p:nvPr/>
+      </p:nvGrpSpPr>
+      <p:grpSpPr>
+        <a:xfrm>
+          <a:off x="0" y="0"/>
+          <a:ext cx="0" cy="0"/>
+          <a:chOff x="0" y="0"/>
+          <a:chExt cx="0" cy="0"/>
+        </a:xfrm>
+      </p:grpSpPr>
+      <p:sp>
+        <p:nvSpPr>
+          <p:cNvPr id="2" name="Slide Image Placeholder 1"/>
+          <p:cNvSpPr>
+            <a:spLocks noGrp="1" noRot="1" noChangeAspect="1"/>
+          </p:cNvSpPr>
+          <p:nvPr>
+            <p:ph type="sldImg"/>
+          </p:nvPr>
+        </p:nvSpPr>
+        <p:spPr/>
+      </p:sp>
+      <p:sp>
+        <p:nvSpPr>
+          <p:cNvPr id="3" name="Notes Placeholder 2"/>
+          <p:cNvSpPr>
+            <a:spLocks noGrp="1"/>
+          </p:cNvSpPr>
+          <p:nvPr>
+            <p:ph type="body" idx="1"/>
+          </p:nvPr>
+        </p:nvSpPr>
+        <p:spPr/>
+        <p:txBody>
+          <a:bodyPr/>
+          <a:lstStyle/>
+          <a:p>
+            <a:r>
+              <a:rPr lang="en-US" dirty="0"/>
+              <a:t>Chiusura concettuale prima delle consegne: il filo OCSE (performance vs apprendimento) + DLW (automazione e sintetico) convergono sul principio §104 già visto all'incontro 1. Richiamarlo esplicitamente: la coerenza tra gli incontri è parte del messaggio.</a:t>
+            </a:r>
+            <a:endParaRPr lang="en-US" dirty="0"/>
+          </a:p>
+        </p:txBody>
+      </p:sp>
+      <p:sp>
+        <p:nvSpPr>
+          <p:cNvPr id="4" name="Slide Number Placeholder 3"/>
+          <p:cNvSpPr>
+            <a:spLocks noGrp="1"/>
+          </p:cNvSpPr>
+          <p:nvPr>
+            <p:ph type="sldNum" sz="quarter" idx="10"/>
+          </p:nvPr>
+        </p:nvSpPr>
+        <p:spPr/>
+        <p:txBody>
+          <a:bodyPr/>
+          <a:lstStyle/>
+          <a:p>
+            <a:fld id="{F7021451-1387-4CA6-816F-3879F97B5CBC}" type="slidenum">
+              <a:rPr lang="en-US"/>
+              <a:t>10</a:t>
+            </a:fld>
+            <a:endParaRPr lang="en-US"/>
+          </a:p>
+        </p:txBody>
+      </p:sp>
+    </p:spTree>
+    <p:extLst>
+      <p:ext uri="{BB962C8B-B14F-4D97-AF65-F5344CB8AC3E}">
+        <p14:creationId xmlns:p14="http://schemas.microsoft.com/office/powerpoint/2010/main" val="1024086991"/>
+      </p:ext>
+    </p:extLst>
+  </p:cSld>
+  <p:clrMapOvr>
+    <a:masterClrMapping/>
+  </p:clrMapOvr>
+</p:notes>
+</file>
+
+<file path=ppt/notesSlides/notesSlide11.xml><?xml version="1.0" encoding="utf-8"?>
+<p:notes xmlns:a="http://schemas.openxmlformats.org/drawingml/2006/main" xmlns:r="http://schemas.openxmlformats.org/officeDocument/2006/relationships" xmlns:p="http://schemas.openxmlformats.org/presentationml/2006/main">
+  <p:cSld>
+    <p:spTree>
+      <p:nvGrpSpPr>
+        <p:cNvPr id="1" name=""/>
+        <p:cNvGrpSpPr/>
+        <p:nvPr/>
+      </p:nvGrpSpPr>
+      <p:grpSpPr>
+        <a:xfrm>
+          <a:off x="0" y="0"/>
+          <a:ext cx="0" cy="0"/>
+          <a:chOff x="0" y="0"/>
+          <a:chExt cx="0" cy="0"/>
+        </a:xfrm>
+      </p:grpSpPr>
+      <p:sp>
+        <p:nvSpPr>
+          <p:cNvPr id="2" name="Slide Image Placeholder 1"/>
+          <p:cNvSpPr>
+            <a:spLocks noGrp="1" noRot="1" noChangeAspect="1"/>
+          </p:cNvSpPr>
+          <p:nvPr>
+            <p:ph type="sldImg"/>
+          </p:nvPr>
+        </p:nvSpPr>
+        <p:spPr/>
+      </p:sp>
+      <p:sp>
+        <p:nvSpPr>
+          <p:cNvPr id="3" name="Notes Placeholder 2"/>
+          <p:cNvSpPr>
+            <a:spLocks noGrp="1"/>
+          </p:cNvSpPr>
+          <p:nvPr>
+            <p:ph type="body" idx="1"/>
+          </p:nvPr>
+        </p:nvSpPr>
+        <p:spPr/>
+        <p:txBody>
+          <a:bodyPr/>
+          <a:lstStyle/>
+          <a:p>
+            <a:r>
+              <a:rPr lang="en-US" dirty="0"/>
+              <a:t>L'elaborato anonimizzato è indispensabile per il laboratorio rubriche di martedì: mandare un promemoria lunedì con le istruzioni di anonimizzazione.</a:t>
+            </a:r>
+            <a:endParaRPr lang="en-US" dirty="0"/>
+          </a:p>
+        </p:txBody>
+      </p:sp>
+      <p:sp>
+        <p:nvSpPr>
+          <p:cNvPr id="4" name="Slide Number Placeholder 3"/>
+          <p:cNvSpPr>
+            <a:spLocks noGrp="1"/>
+          </p:cNvSpPr>
+          <p:nvPr>
+            <p:ph type="sldNum" sz="quarter" idx="10"/>
+          </p:nvPr>
+        </p:nvSpPr>
+        <p:spPr/>
+        <p:txBody>
+          <a:bodyPr/>
+          <a:lstStyle/>
+          <a:p>
+            <a:fld id="{F7021451-1387-4CA6-816F-3879F97B5CBC}" type="slidenum">
+              <a:rPr lang="en-US"/>
+              <a:t>11</a:t>
+            </a:fld>
+            <a:endParaRPr lang="en-US"/>
+          </a:p>
+        </p:txBody>
+      </p:sp>
+    </p:spTree>
+    <p:extLst>
+      <p:ext uri="{BB962C8B-B14F-4D97-AF65-F5344CB8AC3E}">
+        <p14:creationId xmlns:p14="http://schemas.microsoft.com/office/powerpoint/2010/main" val="1024086991"/>
+      </p:ext>
+    </p:extLst>
+  </p:cSld>
+  <p:clrMapOvr>
+    <a:masterClrMapping/>
+  </p:clrMapOvr>
+</p:notes>
+</file>
+
 <file path=ppt/notesSlides/notesSlide2.xml><?xml version="1.0" encoding="utf-8"?>
 <p:notes xmlns:a="http://schemas.openxmlformats.org/drawingml/2006/main" xmlns:r="http://schemas.openxmlformats.org/officeDocument/2006/relationships" xmlns:p="http://schemas.openxmlformats.org/presentationml/2006/main">
   <p:cSld>
@@ -950,7 +1128,7 @@
           <a:p>
             <a:r>
               <a:rPr lang="en-US" dirty="0"/>
-              <a:t>Demo live obbligatoria: interagire col Gem tutor davanti a loro, provare a farsi dare la soluzione e fallire. Il momento più convincente del corso. Poi aprire le istruzioni di sistema e leggerle insieme: nulla di magico, solo progettazione.</a:t>
+              <a:t>Slide dell'equità: Tutor CoPilot mostra che il design giusto aiuta di più chi parte indietro; la citazione UNESCO mostra il rischio speculare dell'uso naïf. Aerts chiude: personalizzare non significa isolare — il tutor IA affianca la classe, non la sostituisce.</a:t>
             </a:r>
             <a:endParaRPr lang="en-US" dirty="0"/>
           </a:p>
@@ -1038,7 +1216,7 @@
           <a:p>
             <a:r>
               <a:rPr lang="en-US" dirty="0"/>
-              <a:t>Richiamare la regola d'oro dell'incontro 1. Il punto sottile: l'IA genera le versioni (livello 2-3), ma l'abbinamento versione-studente è il docente (livello 1). Mostrare le tre versioni della demo agente come esempio concreto.</a:t>
+              <a:t>Demo live obbligatoria: interagire col Gem tutor davanti a loro, provare a farsi dare la soluzione e fallire. Il momento più convincente del corso. Poi aprire le istruzioni di sistema e leggerle insieme: nulla di magico, solo progettazione.</a:t>
             </a:r>
             <a:endParaRPr lang="en-US" dirty="0"/>
           </a:p>
@@ -1126,7 +1304,7 @@
           <a:p>
             <a:r>
               <a:rPr lang="en-US" dirty="0"/>
-              <a:t>Il test incrociato è il passaggio che fa la qualità: nel ruolo di studente si scoprono i buchi delle istruzioni. Raccogliere in plenaria le 'regole aggiunte' migliori: arricchiscono il template comune del corso.</a:t>
+              <a:t>Richiamare la regola d'oro dell'incontro 1. Il punto sottile: l'IA genera le versioni (livello 2-3), ma l'abbinamento versione-studente è il docente (livello 1). Mostrare le tre versioni della demo agente come esempio concreto.</a:t>
             </a:r>
             <a:endParaRPr lang="en-US" dirty="0"/>
           </a:p>
@@ -1214,7 +1392,7 @@
           <a:p>
             <a:r>
               <a:rPr lang="en-US" dirty="0"/>
-              <a:t>L'elaborato anonimizzato è indispensabile per il laboratorio rubriche di martedì: mandare un promemoria lunedì con le istruzioni di anonimizzazione.</a:t>
+              <a:t>Il test incrociato è il passaggio che fa la qualità: nel ruolo di studente si scoprono i buchi delle istruzioni. Raccogliere in plenaria le 'regole aggiunte' migliori: arricchiscono il template comune del corso.</a:t>
             </a:r>
             <a:endParaRPr lang="en-US" dirty="0"/>
           </a:p>
@@ -1871,6 +2049,629 @@
 </p:sld>
 </file>
 
+<file path=ppt/slides/slide10.xml><?xml version="1.0" encoding="utf-8"?>
+<p:sld xmlns:a="http://schemas.openxmlformats.org/drawingml/2006/main" xmlns:r="http://schemas.openxmlformats.org/officeDocument/2006/relationships" xmlns:p="http://schemas.openxmlformats.org/presentationml/2006/main">
+  <p:cSld name="Slide 10">
+    <p:bg>
+      <p:bgPr>
+        <a:solidFill>
+          <a:srgbClr val="FFFFFF"/>
+        </a:solidFill>
+      </p:bgPr>
+    </p:bg>
+    <p:spTree>
+      <p:nvGrpSpPr>
+        <p:cNvPr id="1" name=""/>
+        <p:cNvGrpSpPr/>
+        <p:nvPr/>
+      </p:nvGrpSpPr>
+      <p:grpSpPr>
+        <a:xfrm>
+          <a:off x="0" y="0"/>
+          <a:ext cx="0" cy="0"/>
+          <a:chOff x="0" y="0"/>
+          <a:chExt cx="0" cy="0"/>
+        </a:xfrm>
+      </p:grpSpPr>
+      <p:sp>
+        <p:nvSpPr>
+          <p:cNvPr id="2" name="Shape 0"/>
+          <p:cNvSpPr/>
+          <p:nvPr/>
+        </p:nvSpPr>
+        <p:spPr>
+          <a:xfrm>
+            <a:off x="502920" y="384048"/>
+            <a:ext cx="566928" cy="566928"/>
+          </a:xfrm>
+          <a:prstGeom prst="ellipse">
+            <a:avLst/>
+          </a:prstGeom>
+          <a:solidFill>
+            <a:srgbClr val="1E2761"/>
+          </a:solidFill>
+          <a:ln w="12700">
+            <a:solidFill>
+              <a:srgbClr val="1E2761"/>
+            </a:solidFill>
+            <a:prstDash val="solid"/>
+          </a:ln>
+        </p:spPr>
+      </p:sp>
+      <p:sp>
+        <p:nvSpPr>
+          <p:cNvPr id="3" name="Text 1"/>
+          <p:cNvSpPr/>
+          <p:nvPr/>
+        </p:nvSpPr>
+        <p:spPr>
+          <a:xfrm>
+            <a:off x="502920" y="384048"/>
+            <a:ext cx="566928" cy="566928"/>
+          </a:xfrm>
+          <a:prstGeom prst="rect">
+            <a:avLst/>
+          </a:prstGeom>
+          <a:noFill/>
+          <a:ln/>
+        </p:spPr>
+        <p:txBody>
+          <a:bodyPr wrap="square" lIns="0" tIns="0" rIns="0" bIns="0" rtlCol="0" anchor="ctr"/>
+          <a:lstStyle/>
+          <a:p>
+            <a:pPr algn="ctr" indent="0" marL="0">
+              <a:buNone/>
+            </a:pPr>
+            <a:r>
+              <a:rPr lang="en-US" sz="1800" b="1" dirty="0">
+                <a:solidFill>
+                  <a:srgbClr val="FFFFFF"/>
+                </a:solidFill>
+                <a:latin typeface="Cambria" pitchFamily="34" charset="0"/>
+                <a:ea typeface="Cambria" pitchFamily="34" charset="-122"/>
+                <a:cs typeface="Cambria" pitchFamily="34" charset="-120"/>
+              </a:rPr>
+              <a:t>4</a:t>
+            </a:r>
+            <a:endParaRPr lang="en-US" sz="1800" dirty="0"/>
+          </a:p>
+        </p:txBody>
+      </p:sp>
+      <p:sp>
+        <p:nvSpPr>
+          <p:cNvPr id="4" name="Text 2"/>
+          <p:cNvSpPr/>
+          <p:nvPr/>
+        </p:nvSpPr>
+        <p:spPr>
+          <a:xfrm>
+            <a:off x="1234440" y="347472"/>
+            <a:ext cx="9601200" cy="274320"/>
+          </a:xfrm>
+          <a:prstGeom prst="rect">
+            <a:avLst/>
+          </a:prstGeom>
+          <a:noFill/>
+          <a:ln/>
+        </p:spPr>
+        <p:txBody>
+          <a:bodyPr wrap="square" lIns="0" tIns="0" rIns="0" bIns="0" rtlCol="0" anchor="ctr"/>
+          <a:lstStyle/>
+          <a:p>
+            <a:pPr indent="0" marL="0">
+              <a:buNone/>
+            </a:pPr>
+            <a:r>
+              <a:rPr lang="en-US" sz="1100" dirty="0">
+                <a:solidFill>
+                  <a:srgbClr val="5B6B7C"/>
+                </a:solidFill>
+                <a:latin typeface="Calibri" pitchFamily="34" charset="0"/>
+                <a:ea typeface="Calibri" pitchFamily="34" charset="-122"/>
+                <a:cs typeface="Calibri" pitchFamily="34" charset="-120"/>
+              </a:rPr>
+              <a:t>Edu-GenAI 2 — Didattica Aumentata e Data Literacy</a:t>
+            </a:r>
+            <a:endParaRPr lang="en-US" sz="1100" dirty="0"/>
+          </a:p>
+        </p:txBody>
+      </p:sp>
+      <p:sp>
+        <p:nvSpPr>
+          <p:cNvPr id="5" name="Text 3"/>
+          <p:cNvSpPr/>
+          <p:nvPr/>
+        </p:nvSpPr>
+        <p:spPr>
+          <a:xfrm>
+            <a:off x="1234440" y="566928"/>
+            <a:ext cx="10332720" cy="685800"/>
+          </a:xfrm>
+          <a:prstGeom prst="rect">
+            <a:avLst/>
+          </a:prstGeom>
+          <a:noFill/>
+          <a:ln/>
+        </p:spPr>
+        <p:txBody>
+          <a:bodyPr wrap="square" lIns="0" tIns="0" rIns="0" bIns="0" rtlCol="0" anchor="ctr"/>
+          <a:lstStyle/>
+          <a:p>
+            <a:pPr indent="0" marL="0">
+              <a:buNone/>
+            </a:pPr>
+            <a:r>
+              <a:rPr lang="en-US" sz="3000" b="1" dirty="0">
+                <a:solidFill>
+                  <a:srgbClr val="1E2761"/>
+                </a:solidFill>
+                <a:latin typeface="Cambria" pitchFamily="34" charset="0"/>
+                <a:ea typeface="Cambria" pitchFamily="34" charset="-122"/>
+                <a:cs typeface="Cambria" pitchFamily="34" charset="-120"/>
+              </a:rPr>
+              <a:t>Bussola internazionale 2026</a:t>
+            </a:r>
+            <a:endParaRPr lang="en-US" sz="3000" dirty="0"/>
+          </a:p>
+        </p:txBody>
+      </p:sp>
+      <p:sp>
+        <p:nvSpPr>
+          <p:cNvPr id="6" name="Text 4"/>
+          <p:cNvSpPr/>
+          <p:nvPr/>
+        </p:nvSpPr>
+        <p:spPr>
+          <a:xfrm>
+            <a:off x="822960" y="1600200"/>
+            <a:ext cx="6492240" cy="4754880"/>
+          </a:xfrm>
+          <a:prstGeom prst="rect">
+            <a:avLst/>
+          </a:prstGeom>
+          <a:noFill/>
+          <a:ln/>
+        </p:spPr>
+        <p:txBody>
+          <a:bodyPr wrap="square" lIns="0" tIns="0" rIns="0" bIns="0" rtlCol="0" anchor="t"/>
+          <a:lstStyle/>
+          <a:p>
+            <a:pPr marL="177800" indent="-177800">
+              <a:spcAft>
+                <a:spcPts val="800"/>
+              </a:spcAft>
+              <a:buSzPct val="100000"/>
+              <a:buChar char="•"/>
+            </a:pPr>
+            <a:r>
+              <a:rPr lang="en-US" sz="1500" b="1" dirty="0">
+                <a:solidFill>
+                  <a:srgbClr val="26303B"/>
+                </a:solidFill>
+                <a:latin typeface="Calibri" pitchFamily="34" charset="0"/>
+                <a:ea typeface="Calibri" pitchFamily="34" charset="-122"/>
+                <a:cs typeface="Calibri" pitchFamily="34" charset="-120"/>
+              </a:rPr>
+              <a:t>OECD Digital Education Outlook 2026: il divario tra performance apparente e apprendimento reale è IL tema — «partner di apprendimento, non scorciatoia»</a:t>
+            </a:r>
+            <a:endParaRPr lang="en-US" sz="1500" dirty="0"/>
+          </a:p>
+          <a:p>
+            <a:pPr marL="177800" indent="-177800">
+              <a:spcAft>
+                <a:spcPts val="800"/>
+              </a:spcAft>
+              <a:buSzPct val="100000"/>
+              <a:buChar char="•"/>
+            </a:pPr>
+            <a:r>
+              <a:rPr lang="en-US" sz="1500" dirty="0">
+                <a:solidFill>
+                  <a:srgbClr val="26303B"/>
+                </a:solidFill>
+                <a:latin typeface="Calibri" pitchFamily="34" charset="0"/>
+                <a:ea typeface="Calibri" pitchFamily="34" charset="-122"/>
+                <a:cs typeface="Calibri" pitchFamily="34" charset="-120"/>
+              </a:rPr>
+              <a:t>UNESCO Digital Learning Week 2026 (appena conclusa a Parigi): il dibattito sui rischi di dipendenza dall'automazione e sui contenuti sintetici — il vostro tutor con fading è la risposta progettuale</a:t>
+            </a:r>
+            <a:endParaRPr lang="en-US" sz="1500" dirty="0"/>
+          </a:p>
+          <a:p>
+            <a:pPr marL="177800" indent="-177800">
+              <a:spcAft>
+                <a:spcPts val="800"/>
+              </a:spcAft>
+              <a:buSzPct val="100000"/>
+              <a:buChar char="•"/>
+            </a:pPr>
+            <a:r>
+              <a:rPr lang="en-US" sz="1500" dirty="0">
+                <a:solidFill>
+                  <a:srgbClr val="26303B"/>
+                </a:solidFill>
+                <a:latin typeface="Calibri" pitchFamily="34" charset="0"/>
+                <a:ea typeface="Calibri" pitchFamily="34" charset="-122"/>
+                <a:cs typeface="Calibri" pitchFamily="34" charset="-120"/>
+              </a:rPr>
+              <a:t>La regola che tiene insieme tutto (Racc. UNESCO etica IA, §104): «AI should support the learning process without reducing cognitive abilities»</a:t>
+            </a:r>
+            <a:endParaRPr lang="en-US" sz="1500" dirty="0"/>
+          </a:p>
+        </p:txBody>
+      </p:sp>
+      <p:sp>
+        <p:nvSpPr>
+          <p:cNvPr id="7" name="Shape 5"/>
+          <p:cNvSpPr/>
+          <p:nvPr/>
+        </p:nvSpPr>
+        <p:spPr>
+          <a:xfrm>
+            <a:off x="7635240" y="1600200"/>
+            <a:ext cx="3977640" cy="4480560"/>
+          </a:xfrm>
+          <a:prstGeom prst="roundRect">
+            <a:avLst>
+              <a:gd name="adj" fmla="val 2069"/>
+            </a:avLst>
+          </a:prstGeom>
+          <a:solidFill>
+            <a:srgbClr val="E9F1FB"/>
+          </a:solidFill>
+          <a:ln w="12700">
+            <a:solidFill>
+              <a:srgbClr val="E9F1FB"/>
+            </a:solidFill>
+            <a:prstDash val="solid"/>
+          </a:ln>
+        </p:spPr>
+      </p:sp>
+      <p:sp>
+        <p:nvSpPr>
+          <p:cNvPr id="8" name="Text 6"/>
+          <p:cNvSpPr/>
+          <p:nvPr/>
+        </p:nvSpPr>
+        <p:spPr>
+          <a:xfrm>
+            <a:off x="7863840" y="1764792"/>
+            <a:ext cx="3520440" cy="320040"/>
+          </a:xfrm>
+          <a:prstGeom prst="rect">
+            <a:avLst/>
+          </a:prstGeom>
+          <a:noFill/>
+          <a:ln/>
+        </p:spPr>
+        <p:txBody>
+          <a:bodyPr wrap="square" lIns="0" tIns="0" rIns="0" bIns="0" rtlCol="0" anchor="ctr"/>
+          <a:lstStyle/>
+          <a:p>
+            <a:pPr indent="0" marL="0">
+              <a:buNone/>
+            </a:pPr>
+            <a:r>
+              <a:rPr lang="en-US" sz="1450" b="1" dirty="0">
+                <a:solidFill>
+                  <a:srgbClr val="1E2761"/>
+                </a:solidFill>
+                <a:latin typeface="Cambria" pitchFamily="34" charset="0"/>
+                <a:ea typeface="Cambria" pitchFamily="34" charset="-122"/>
+                <a:cs typeface="Cambria" pitchFamily="34" charset="-120"/>
+              </a:rPr>
+              <a:t>In una frase</a:t>
+            </a:r>
+            <a:endParaRPr lang="en-US" sz="1450" dirty="0"/>
+          </a:p>
+        </p:txBody>
+      </p:sp>
+      <p:sp>
+        <p:nvSpPr>
+          <p:cNvPr id="9" name="Text 7"/>
+          <p:cNvSpPr/>
+          <p:nvPr/>
+        </p:nvSpPr>
+        <p:spPr>
+          <a:xfrm>
+            <a:off x="7863840" y="2130552"/>
+            <a:ext cx="3520440" cy="3794760"/>
+          </a:xfrm>
+          <a:prstGeom prst="rect">
+            <a:avLst/>
+          </a:prstGeom>
+          <a:noFill/>
+          <a:ln/>
+        </p:spPr>
+        <p:txBody>
+          <a:bodyPr wrap="square" lIns="0" tIns="0" rIns="0" bIns="0" rtlCol="0" anchor="t"/>
+          <a:lstStyle/>
+          <a:p>
+            <a:pPr indent="0" marL="0">
+              <a:spcAft>
+                <a:spcPts val="500"/>
+              </a:spcAft>
+              <a:buNone/>
+            </a:pPr>
+            <a:r>
+              <a:rPr lang="en-US" sz="1250" b="1" dirty="0">
+                <a:solidFill>
+                  <a:srgbClr val="26303B"/>
+                </a:solidFill>
+                <a:latin typeface="Calibri" pitchFamily="34" charset="0"/>
+                <a:ea typeface="Calibri" pitchFamily="34" charset="-122"/>
+                <a:cs typeface="Calibri" pitchFamily="34" charset="-120"/>
+              </a:rPr>
+              <a:t>Il tutor ben progettato dà il minimo aiuto sufficiente e impara a togliersi di mezzo</a:t>
+            </a:r>
+            <a:endParaRPr lang="en-US" sz="1250" dirty="0"/>
+          </a:p>
+          <a:p>
+            <a:pPr indent="0" marL="0">
+              <a:spcAft>
+                <a:spcPts val="500"/>
+              </a:spcAft>
+              <a:buNone/>
+            </a:pPr>
+            <a:r>
+              <a:rPr lang="en-US" sz="1250" dirty="0">
+                <a:solidFill>
+                  <a:srgbClr val="26303B"/>
+                </a:solidFill>
+                <a:latin typeface="Calibri" pitchFamily="34" charset="0"/>
+                <a:ea typeface="Calibri" pitchFamily="34" charset="-122"/>
+                <a:cs typeface="Calibri" pitchFamily="34" charset="-120"/>
+              </a:rPr>
+              <a:t>Tutto il resto è ingegneria di questa frase</a:t>
+            </a:r>
+            <a:endParaRPr lang="en-US" sz="1250" dirty="0"/>
+          </a:p>
+        </p:txBody>
+      </p:sp>
+    </p:spTree>
+  </p:cSld>
+  <p:clrMapOvr>
+    <a:masterClrMapping/>
+  </p:clrMapOvr>
+</p:sld>
+</file>
+
+<file path=ppt/slides/slide11.xml><?xml version="1.0" encoding="utf-8"?>
+<p:sld xmlns:a="http://schemas.openxmlformats.org/drawingml/2006/main" xmlns:r="http://schemas.openxmlformats.org/officeDocument/2006/relationships" xmlns:p="http://schemas.openxmlformats.org/presentationml/2006/main">
+  <p:cSld name="Slide 11">
+    <p:bg>
+      <p:bgPr>
+        <a:solidFill>
+          <a:srgbClr val="1E2761"/>
+        </a:solidFill>
+      </p:bgPr>
+    </p:bg>
+    <p:spTree>
+      <p:nvGrpSpPr>
+        <p:cNvPr id="1" name=""/>
+        <p:cNvGrpSpPr/>
+        <p:nvPr/>
+      </p:nvGrpSpPr>
+      <p:grpSpPr>
+        <a:xfrm>
+          <a:off x="0" y="0"/>
+          <a:ext cx="0" cy="0"/>
+          <a:chOff x="0" y="0"/>
+          <a:chExt cx="0" cy="0"/>
+        </a:xfrm>
+      </p:grpSpPr>
+      <p:sp>
+        <p:nvSpPr>
+          <p:cNvPr id="2" name="Text 0"/>
+          <p:cNvSpPr/>
+          <p:nvPr/>
+        </p:nvSpPr>
+        <p:spPr>
+          <a:xfrm>
+            <a:off x="822960" y="731520"/>
+            <a:ext cx="10515600" cy="640080"/>
+          </a:xfrm>
+          <a:prstGeom prst="rect">
+            <a:avLst/>
+          </a:prstGeom>
+          <a:noFill/>
+          <a:ln/>
+        </p:spPr>
+        <p:txBody>
+          <a:bodyPr wrap="square" lIns="0" tIns="0" rIns="0" bIns="0" rtlCol="0" anchor="ctr"/>
+          <a:lstStyle/>
+          <a:p>
+            <a:pPr indent="0" marL="0">
+              <a:buNone/>
+            </a:pPr>
+            <a:r>
+              <a:rPr lang="en-US" sz="3400" b="1" dirty="0">
+                <a:solidFill>
+                  <a:srgbClr val="FFFFFF"/>
+                </a:solidFill>
+                <a:latin typeface="Cambria" pitchFamily="34" charset="0"/>
+                <a:ea typeface="Cambria" pitchFamily="34" charset="-122"/>
+                <a:cs typeface="Cambria" pitchFamily="34" charset="-120"/>
+              </a:rPr>
+              <a:t>Per il prossimo incontro</a:t>
+            </a:r>
+            <a:endParaRPr lang="en-US" sz="3400" dirty="0"/>
+          </a:p>
+        </p:txBody>
+      </p:sp>
+      <p:sp>
+        <p:nvSpPr>
+          <p:cNvPr id="3" name="Text 1"/>
+          <p:cNvSpPr/>
+          <p:nvPr/>
+        </p:nvSpPr>
+        <p:spPr>
+          <a:xfrm>
+            <a:off x="822960" y="1645920"/>
+            <a:ext cx="10515600" cy="3108960"/>
+          </a:xfrm>
+          <a:prstGeom prst="rect">
+            <a:avLst/>
+          </a:prstGeom>
+          <a:noFill/>
+          <a:ln/>
+        </p:spPr>
+        <p:txBody>
+          <a:bodyPr wrap="square" lIns="0" tIns="0" rIns="0" bIns="0" rtlCol="0" anchor="t"/>
+          <a:lstStyle/>
+          <a:p>
+            <a:pPr marL="177800" indent="-177800">
+              <a:spcAft>
+                <a:spcPts val="1000"/>
+              </a:spcAft>
+              <a:buSzPct val="100000"/>
+              <a:buChar char="•"/>
+            </a:pPr>
+            <a:r>
+              <a:rPr lang="en-US" sz="1600" dirty="0">
+                <a:solidFill>
+                  <a:srgbClr val="FFFFFF"/>
+                </a:solidFill>
+                <a:latin typeface="Calibri" pitchFamily="34" charset="0"/>
+                <a:ea typeface="Calibri" pitchFamily="34" charset="-122"/>
+                <a:cs typeface="Calibri" pitchFamily="34" charset="-120"/>
+              </a:rPr>
+              <a:t>Rifinire le istruzioni del vostro tutor e collegarlo alle fasi della UdA nel canvas</a:t>
+            </a:r>
+            <a:endParaRPr lang="en-US" sz="1600" dirty="0"/>
+          </a:p>
+          <a:p>
+            <a:pPr marL="177800" indent="-177800">
+              <a:spcAft>
+                <a:spcPts val="1000"/>
+              </a:spcAft>
+              <a:buSzPct val="100000"/>
+              <a:buChar char="•"/>
+            </a:pPr>
+            <a:r>
+              <a:rPr lang="en-US" sz="1600" dirty="0">
+                <a:solidFill>
+                  <a:srgbClr val="FFFFFF"/>
+                </a:solidFill>
+                <a:latin typeface="Calibri" pitchFamily="34" charset="0"/>
+                <a:ea typeface="Calibri" pitchFamily="34" charset="-122"/>
+                <a:cs typeface="Calibri" pitchFamily="34" charset="-120"/>
+              </a:rPr>
+              <a:t>Portare martedì: un elaborato di studente ANONIMIZZATO (senza nome né riferimenti) su cui lavorare con le rubriche</a:t>
+            </a:r>
+            <a:endParaRPr lang="en-US" sz="1600" dirty="0"/>
+          </a:p>
+          <a:p>
+            <a:pPr marL="177800" indent="-177800">
+              <a:spcAft>
+                <a:spcPts val="1000"/>
+              </a:spcAft>
+              <a:buSzPct val="100000"/>
+              <a:buChar char="•"/>
+            </a:pPr>
+            <a:r>
+              <a:rPr lang="en-US" sz="1600" dirty="0">
+                <a:solidFill>
+                  <a:srgbClr val="FFFFFF"/>
+                </a:solidFill>
+                <a:latin typeface="Calibri" pitchFamily="34" charset="0"/>
+                <a:ea typeface="Calibri" pitchFamily="34" charset="-122"/>
+                <a:cs typeface="Calibri" pitchFamily="34" charset="-120"/>
+              </a:rPr>
+              <a:t>Facoltativo: Bloom, 'The 2 Sigma Problem' (4 pagine, invecchiato benissimo)</a:t>
+            </a:r>
+            <a:endParaRPr lang="en-US" sz="1600" dirty="0"/>
+          </a:p>
+        </p:txBody>
+      </p:sp>
+      <p:sp>
+        <p:nvSpPr>
+          <p:cNvPr id="4" name="Shape 2"/>
+          <p:cNvSpPr/>
+          <p:nvPr/>
+        </p:nvSpPr>
+        <p:spPr>
+          <a:xfrm>
+            <a:off x="822960" y="4937760"/>
+            <a:ext cx="10515600" cy="1188720"/>
+          </a:xfrm>
+          <a:prstGeom prst="roundRect">
+            <a:avLst>
+              <a:gd name="adj" fmla="val 6923"/>
+            </a:avLst>
+          </a:prstGeom>
+          <a:solidFill>
+            <a:srgbClr val="CADCFC"/>
+          </a:solidFill>
+          <a:ln w="12700">
+            <a:solidFill>
+              <a:srgbClr val="CADCFC"/>
+            </a:solidFill>
+            <a:prstDash val="solid"/>
+          </a:ln>
+        </p:spPr>
+      </p:sp>
+      <p:sp>
+        <p:nvSpPr>
+          <p:cNvPr id="5" name="Text 3"/>
+          <p:cNvSpPr/>
+          <p:nvPr/>
+        </p:nvSpPr>
+        <p:spPr>
+          <a:xfrm>
+            <a:off x="1097280" y="4937760"/>
+            <a:ext cx="9966960" cy="1188720"/>
+          </a:xfrm>
+          <a:prstGeom prst="rect">
+            <a:avLst/>
+          </a:prstGeom>
+          <a:noFill/>
+          <a:ln/>
+        </p:spPr>
+        <p:txBody>
+          <a:bodyPr wrap="square" lIns="0" tIns="0" rIns="0" bIns="0" rtlCol="0" anchor="ctr"/>
+          <a:lstStyle/>
+          <a:p>
+            <a:pPr indent="0" marL="0">
+              <a:buNone/>
+            </a:pPr>
+            <a:r>
+              <a:rPr lang="en-US" sz="1600" b="1" dirty="0">
+                <a:solidFill>
+                  <a:srgbClr val="1E2761"/>
+                </a:solidFill>
+                <a:latin typeface="Cambria" pitchFamily="34" charset="0"/>
+                <a:ea typeface="Cambria" pitchFamily="34" charset="-122"/>
+                <a:cs typeface="Cambria" pitchFamily="34" charset="-120"/>
+              </a:rPr>
+              <a:t>Incontro 5 — martedì 15 settembre:  </a:t>
+            </a:r>
+            <a:pPr indent="0" marL="0">
+              <a:buNone/>
+            </a:pPr>
+            <a:r>
+              <a:rPr lang="en-US" sz="1400" dirty="0">
+                <a:solidFill>
+                  <a:srgbClr val="26303B"/>
+                </a:solidFill>
+                <a:latin typeface="Calibri" pitchFamily="34" charset="0"/>
+                <a:ea typeface="Calibri" pitchFamily="34" charset="-122"/>
+                <a:cs typeface="Calibri" pitchFamily="34" charset="-120"/>
+              </a:rPr>
+              <a:t>Data literacy e valutazione assistita: bias, allucinazioni, rubriche co-progettate — e chi valuta resta chiaro.</a:t>
+            </a:r>
+            <a:endParaRPr lang="en-US" sz="1600" dirty="0"/>
+          </a:p>
+        </p:txBody>
+      </p:sp>
+    </p:spTree>
+  </p:cSld>
+  <p:clrMapOvr>
+    <a:masterClrMapping/>
+  </p:clrMapOvr>
+</p:sld>
+</file>
+
 <file path=ppt/slides/slide2.xml><?xml version="1.0" encoding="utf-8"?>
 <p:sld xmlns:a="http://schemas.openxmlformats.org/drawingml/2006/main" xmlns:r="http://schemas.openxmlformats.org/officeDocument/2006/relationships" xmlns:p="http://schemas.openxmlformats.org/presentationml/2006/main">
   <p:cSld name="Slide 2">
@@ -4664,7 +5465,7 @@
                 <a:ea typeface="Cambria" pitchFamily="34" charset="-122"/>
                 <a:cs typeface="Cambria" pitchFamily="34" charset="-120"/>
               </a:rPr>
-              <a:t>Il tutor socratico: tre regole nel prompt</a:t>
+              <a:t>E per chi parte più indietro?</a:t>
             </a:r>
             <a:endParaRPr lang="en-US" sz="3000" dirty="0"/>
           </a:p>
@@ -4672,14 +5473,119 @@
       </p:sp>
       <p:sp>
         <p:nvSpPr>
-          <p:cNvPr id="6" name="Text 4"/>
-          <p:cNvSpPr/>
-          <p:nvPr/>
-        </p:nvSpPr>
-        <p:spPr>
-          <a:xfrm>
-            <a:off x="822960" y="1600200"/>
-            <a:ext cx="6492240" cy="4754880"/>
+          <p:cNvPr id="6" name="Shape 4"/>
+          <p:cNvSpPr/>
+          <p:nvPr/>
+        </p:nvSpPr>
+        <p:spPr>
+          <a:xfrm>
+            <a:off x="822960" y="1737360"/>
+            <a:ext cx="4206240" cy="4206240"/>
+          </a:xfrm>
+          <a:prstGeom prst="roundRect">
+            <a:avLst>
+              <a:gd name="adj" fmla="val 2174"/>
+            </a:avLst>
+          </a:prstGeom>
+          <a:solidFill>
+            <a:srgbClr val="1E2761"/>
+          </a:solidFill>
+          <a:ln w="12700">
+            <a:solidFill>
+              <a:srgbClr val="1E2761"/>
+            </a:solidFill>
+            <a:prstDash val="solid"/>
+          </a:ln>
+        </p:spPr>
+      </p:sp>
+      <p:sp>
+        <p:nvSpPr>
+          <p:cNvPr id="7" name="Text 5"/>
+          <p:cNvSpPr/>
+          <p:nvPr/>
+        </p:nvSpPr>
+        <p:spPr>
+          <a:xfrm>
+            <a:off x="822960" y="2286000"/>
+            <a:ext cx="4206240" cy="1463040"/>
+          </a:xfrm>
+          <a:prstGeom prst="rect">
+            <a:avLst/>
+          </a:prstGeom>
+          <a:noFill/>
+          <a:ln/>
+        </p:spPr>
+        <p:txBody>
+          <a:bodyPr wrap="square" lIns="0" tIns="0" rIns="0" bIns="0" rtlCol="0" anchor="ctr"/>
+          <a:lstStyle/>
+          <a:p>
+            <a:pPr algn="ctr" indent="0" marL="0">
+              <a:buNone/>
+            </a:pPr>
+            <a:r>
+              <a:rPr lang="en-US" sz="6400" b="1" dirty="0">
+                <a:solidFill>
+                  <a:srgbClr val="FFFFFF"/>
+                </a:solidFill>
+                <a:latin typeface="Cambria" pitchFamily="34" charset="0"/>
+                <a:ea typeface="Cambria" pitchFamily="34" charset="-122"/>
+                <a:cs typeface="Cambria" pitchFamily="34" charset="-120"/>
+              </a:rPr>
+              <a:t>+9</a:t>
+            </a:r>
+            <a:endParaRPr lang="en-US" sz="6400" dirty="0"/>
+          </a:p>
+        </p:txBody>
+      </p:sp>
+      <p:sp>
+        <p:nvSpPr>
+          <p:cNvPr id="8" name="Text 6"/>
+          <p:cNvSpPr/>
+          <p:nvPr/>
+        </p:nvSpPr>
+        <p:spPr>
+          <a:xfrm>
+            <a:off x="1097280" y="3794760"/>
+            <a:ext cx="3657600" cy="1737360"/>
+          </a:xfrm>
+          <a:prstGeom prst="rect">
+            <a:avLst/>
+          </a:prstGeom>
+          <a:noFill/>
+          <a:ln/>
+        </p:spPr>
+        <p:txBody>
+          <a:bodyPr wrap="square" lIns="0" tIns="0" rIns="0" bIns="0" rtlCol="0" anchor="ctr"/>
+          <a:lstStyle/>
+          <a:p>
+            <a:pPr algn="ctr" indent="0" marL="0">
+              <a:buNone/>
+            </a:pPr>
+            <a:r>
+              <a:rPr lang="en-US" sz="1450" dirty="0">
+                <a:solidFill>
+                  <a:srgbClr val="CADCFC"/>
+                </a:solidFill>
+                <a:latin typeface="Calibri" pitchFamily="34" charset="0"/>
+                <a:ea typeface="Calibri" pitchFamily="34" charset="-122"/>
+                <a:cs typeface="Calibri" pitchFamily="34" charset="-120"/>
+              </a:rPr>
+              <a:t>punti percentuali di mastery con i tutor MENO esperti — Tutor CoPilot, RCT su 900 tutor e 1.800 studenti (OECD Outlook 2026)</a:t>
+            </a:r>
+            <a:endParaRPr lang="en-US" sz="1450" dirty="0"/>
+          </a:p>
+        </p:txBody>
+      </p:sp>
+      <p:sp>
+        <p:nvSpPr>
+          <p:cNvPr id="9" name="Text 7"/>
+          <p:cNvSpPr/>
+          <p:nvPr/>
+        </p:nvSpPr>
+        <p:spPr>
+          <a:xfrm>
+            <a:off x="5577840" y="1828800"/>
+            <a:ext cx="6035040" cy="4206240"/>
           </a:xfrm>
           <a:prstGeom prst="rect">
             <a:avLst/>
@@ -4707,7 +5613,7 @@
                 <a:ea typeface="Calibri" pitchFamily="34" charset="-122"/>
                 <a:cs typeface="Calibri" pitchFamily="34" charset="-120"/>
               </a:rPr>
-              <a:t>1. Domanda, non rispondere: guida con domande progressive verso la soluzione</a:t>
+              <a:t>L'IA che suggerisce domande-guida invece di risposte 'scala la pedagogia esperta': il beneficio maggiore va a chi ha meno esperienza</a:t>
             </a:r>
             <a:endParaRPr lang="en-US" sz="1500" dirty="0"/>
           </a:p>
@@ -4720,7 +5626,7 @@
               <a:buChar char="•"/>
             </a:pPr>
             <a:r>
-              <a:rPr lang="en-US" sz="1500" b="1" dirty="0">
+              <a:rPr lang="en-US" sz="1500" dirty="0">
                 <a:solidFill>
                   <a:srgbClr val="26303B"/>
                 </a:solidFill>
@@ -4728,7 +5634,7 @@
                 <a:ea typeface="Calibri" pitchFamily="34" charset="-122"/>
                 <a:cs typeface="Calibri" pitchFamily="34" charset="-120"/>
               </a:rPr>
-              <a:t>2. Correzione ritardata: davanti all'errore, non dare la risposta — chiedi di verificare il passaggio</a:t>
+              <a:t>Il contraltare (UNESCO 2026): «i principianti rischiano di usare l'IA in modi che degradano le loro capacità, mentre gli esperti beneficiano delle capacità aumentate»</a:t>
             </a:r>
             <a:endParaRPr lang="en-US" sz="1500" dirty="0"/>
           </a:p>
@@ -4741,7 +5647,7 @@
               <a:buChar char="•"/>
             </a:pPr>
             <a:r>
-              <a:rPr lang="en-US" sz="1500" b="1" dirty="0">
+              <a:rPr lang="en-US" sz="1500" dirty="0">
                 <a:solidFill>
                   <a:srgbClr val="26303B"/>
                 </a:solidFill>
@@ -4749,7 +5655,7 @@
                 <a:ea typeface="Calibri" pitchFamily="34" charset="-122"/>
                 <a:cs typeface="Calibri" pitchFamily="34" charset="-120"/>
               </a:rPr>
-              <a:t>3. Fading esplicito: 'riduci l'aiuto man mano che lo studente mostra padronanza; se chiede la soluzione diretta, proponi prima un ultimo tentativo'</a:t>
+              <a:t>Le due frasi insieme sono la tesi dell'equità: lo scaffolding ben progettato è una leva di giustizia educativa, l'uso naïf la ribalta</a:t>
             </a:r>
             <a:endParaRPr lang="en-US" sz="1500" dirty="0"/>
           </a:p>
@@ -4770,202 +5676,9 @@
                 <a:ea typeface="Calibri" pitchFamily="34" charset="-122"/>
                 <a:cs typeface="Calibri" pitchFamily="34" charset="-120"/>
               </a:rPr>
-              <a:t>Più: linguaggio adatto all'età, registro incoraggiante, mai sarcasmo, stop se emergono dati personali</a:t>
+              <a:t>Attenzione anche alle 'learning echo chambers' (Aerts, UNESCO 2025): l'iper-personalizzazione che isola — la personalizzazione resta dialogica e sociale</a:t>
             </a:r>
             <a:endParaRPr lang="en-US" sz="1500" dirty="0"/>
-          </a:p>
-          <a:p>
-            <a:pPr marL="177800" indent="-177800">
-              <a:spcAft>
-                <a:spcPts val="800"/>
-              </a:spcAft>
-              <a:buSzPct val="100000"/>
-              <a:buChar char="•"/>
-            </a:pPr>
-            <a:r>
-              <a:rPr lang="en-US" sz="1500" dirty="0">
-                <a:solidFill>
-                  <a:srgbClr val="26303B"/>
-                </a:solidFill>
-                <a:latin typeface="Calibri" pitchFamily="34" charset="0"/>
-                <a:ea typeface="Calibri" pitchFamily="34" charset="-122"/>
-                <a:cs typeface="Calibri" pitchFamily="34" charset="-120"/>
-              </a:rPr>
-              <a:t>Tutto questo sono ISTRUZIONI DI SISTEMA di un Gem: si scrivono una volta, valgono per ogni conversazione</a:t>
-            </a:r>
-            <a:endParaRPr lang="en-US" sz="1500" dirty="0"/>
-          </a:p>
-        </p:txBody>
-      </p:sp>
-      <p:sp>
-        <p:nvSpPr>
-          <p:cNvPr id="7" name="Shape 5"/>
-          <p:cNvSpPr/>
-          <p:nvPr/>
-        </p:nvSpPr>
-        <p:spPr>
-          <a:xfrm>
-            <a:off x="7635240" y="1600200"/>
-            <a:ext cx="3977640" cy="4480560"/>
-          </a:xfrm>
-          <a:prstGeom prst="roundRect">
-            <a:avLst>
-              <a:gd name="adj" fmla="val 2069"/>
-            </a:avLst>
-          </a:prstGeom>
-          <a:solidFill>
-            <a:srgbClr val="E9F1FB"/>
-          </a:solidFill>
-          <a:ln w="12700">
-            <a:solidFill>
-              <a:srgbClr val="E9F1FB"/>
-            </a:solidFill>
-            <a:prstDash val="solid"/>
-          </a:ln>
-        </p:spPr>
-      </p:sp>
-      <p:sp>
-        <p:nvSpPr>
-          <p:cNvPr id="8" name="Text 6"/>
-          <p:cNvSpPr/>
-          <p:nvPr/>
-        </p:nvSpPr>
-        <p:spPr>
-          <a:xfrm>
-            <a:off x="7863840" y="1764792"/>
-            <a:ext cx="3520440" cy="320040"/>
-          </a:xfrm>
-          <a:prstGeom prst="rect">
-            <a:avLst/>
-          </a:prstGeom>
-          <a:noFill/>
-          <a:ln/>
-        </p:spPr>
-        <p:txBody>
-          <a:bodyPr wrap="square" lIns="0" tIns="0" rIns="0" bIns="0" rtlCol="0" anchor="ctr"/>
-          <a:lstStyle/>
-          <a:p>
-            <a:pPr indent="0" marL="0">
-              <a:buNone/>
-            </a:pPr>
-            <a:r>
-              <a:rPr lang="en-US" sz="1450" b="1" dirty="0">
-                <a:solidFill>
-                  <a:srgbClr val="1E2761"/>
-                </a:solidFill>
-                <a:latin typeface="Cambria" pitchFamily="34" charset="0"/>
-                <a:ea typeface="Cambria" pitchFamily="34" charset="-122"/>
-                <a:cs typeface="Cambria" pitchFamily="34" charset="-120"/>
-              </a:rPr>
-              <a:t>Dal vivo</a:t>
-            </a:r>
-            <a:endParaRPr lang="en-US" sz="1450" dirty="0"/>
-          </a:p>
-        </p:txBody>
-      </p:sp>
-      <p:sp>
-        <p:nvSpPr>
-          <p:cNvPr id="9" name="Text 7"/>
-          <p:cNvSpPr/>
-          <p:nvPr/>
-        </p:nvSpPr>
-        <p:spPr>
-          <a:xfrm>
-            <a:off x="7863840" y="2130552"/>
-            <a:ext cx="3520440" cy="3794760"/>
-          </a:xfrm>
-          <a:prstGeom prst="rect">
-            <a:avLst/>
-          </a:prstGeom>
-          <a:noFill/>
-          <a:ln/>
-        </p:spPr>
-        <p:txBody>
-          <a:bodyPr wrap="square" lIns="0" tIns="0" rIns="0" bIns="0" rtlCol="0" anchor="t"/>
-          <a:lstStyle/>
-          <a:p>
-            <a:pPr marL="152400" indent="-152400">
-              <a:spcAft>
-                <a:spcPts val="500"/>
-              </a:spcAft>
-              <a:buSzPct val="100000"/>
-              <a:buChar char="•"/>
-            </a:pPr>
-            <a:r>
-              <a:rPr lang="en-US" sz="1250" dirty="0">
-                <a:solidFill>
-                  <a:srgbClr val="26303B"/>
-                </a:solidFill>
-                <a:latin typeface="Calibri" pitchFamily="34" charset="0"/>
-                <a:ea typeface="Calibri" pitchFamily="34" charset="-122"/>
-                <a:cs typeface="Calibri" pitchFamily="34" charset="-120"/>
-              </a:rPr>
-              <a:t>Demo: il Gem 'Tutor di matematica' del corso</a:t>
-            </a:r>
-            <a:endParaRPr lang="en-US" sz="1250" dirty="0"/>
-          </a:p>
-          <a:p>
-            <a:pPr marL="152400" indent="-152400">
-              <a:spcAft>
-                <a:spcPts val="500"/>
-              </a:spcAft>
-              <a:buSzPct val="100000"/>
-              <a:buChar char="•"/>
-            </a:pPr>
-            <a:r>
-              <a:rPr lang="en-US" sz="1250" dirty="0">
-                <a:solidFill>
-                  <a:srgbClr val="26303B"/>
-                </a:solidFill>
-                <a:latin typeface="Calibri" pitchFamily="34" charset="0"/>
-                <a:ea typeface="Calibri" pitchFamily="34" charset="-122"/>
-                <a:cs typeface="Calibri" pitchFamily="34" charset="-120"/>
-              </a:rPr>
-              <a:t>Gli chiedo la soluzione: non me la dà</a:t>
-            </a:r>
-            <a:endParaRPr lang="en-US" sz="1250" dirty="0"/>
-          </a:p>
-          <a:p>
-            <a:pPr marL="152400" indent="-152400">
-              <a:spcAft>
-                <a:spcPts val="500"/>
-              </a:spcAft>
-              <a:buSzPct val="100000"/>
-              <a:buChar char="•"/>
-            </a:pPr>
-            <a:r>
-              <a:rPr lang="en-US" sz="1250" dirty="0">
-                <a:solidFill>
-                  <a:srgbClr val="26303B"/>
-                </a:solidFill>
-                <a:latin typeface="Calibri" pitchFamily="34" charset="0"/>
-                <a:ea typeface="Calibri" pitchFamily="34" charset="-122"/>
-                <a:cs typeface="Calibri" pitchFamily="34" charset="-120"/>
-              </a:rPr>
-              <a:t>Sbaglio un passaggio: mi rimanda al punto critico</a:t>
-            </a:r>
-            <a:endParaRPr lang="en-US" sz="1250" dirty="0"/>
-          </a:p>
-          <a:p>
-            <a:pPr marL="152400" indent="-152400">
-              <a:spcAft>
-                <a:spcPts val="500"/>
-              </a:spcAft>
-              <a:buSzPct val="100000"/>
-              <a:buChar char="•"/>
-            </a:pPr>
-            <a:r>
-              <a:rPr lang="en-US" sz="1250" b="1" dirty="0">
-                <a:solidFill>
-                  <a:srgbClr val="26303B"/>
-                </a:solidFill>
-                <a:latin typeface="Calibri" pitchFamily="34" charset="0"/>
-                <a:ea typeface="Calibri" pitchFamily="34" charset="-122"/>
-                <a:cs typeface="Calibri" pitchFamily="34" charset="-120"/>
-              </a:rPr>
-              <a:t>Le istruzioni complete sono nei Materiali operativi</a:t>
-            </a:r>
-            <a:endParaRPr lang="en-US" sz="1250" dirty="0"/>
           </a:p>
         </p:txBody>
       </p:sp>
@@ -5137,7 +5850,7 @@
                 <a:ea typeface="Cambria" pitchFamily="34" charset="-122"/>
                 <a:cs typeface="Cambria" pitchFamily="34" charset="-120"/>
               </a:rPr>
-              <a:t>Personalizzare per profili, mai per persone</a:t>
+              <a:t>Il tutor socratico: tre regole nel prompt</a:t>
             </a:r>
             <a:endParaRPr lang="en-US" sz="3000" dirty="0"/>
           </a:p>
@@ -5152,7 +5865,7 @@
         <p:spPr>
           <a:xfrm>
             <a:off x="822960" y="1600200"/>
-            <a:ext cx="10515600" cy="4754880"/>
+            <a:ext cx="6492240" cy="4754880"/>
           </a:xfrm>
           <a:prstGeom prst="rect">
             <a:avLst/>
@@ -5180,7 +5893,7 @@
                 <a:ea typeface="Calibri" pitchFamily="34" charset="-122"/>
                 <a:cs typeface="Calibri" pitchFamily="34" charset="-120"/>
               </a:rPr>
-              <a:t>Si progettano VERSIONI dei materiali: alta leggibilità, base, potenziamento — profili, non elenchi di nomi</a:t>
+              <a:t>1. Domanda, non rispondere: guida con domande progressive verso la soluzione</a:t>
             </a:r>
             <a:endParaRPr lang="en-US" sz="1500" dirty="0"/>
           </a:p>
@@ -5193,7 +5906,7 @@
               <a:buChar char="•"/>
             </a:pPr>
             <a:r>
-              <a:rPr lang="en-US" sz="1500" dirty="0">
+              <a:rPr lang="en-US" sz="1500" b="1" dirty="0">
                 <a:solidFill>
                   <a:srgbClr val="26303B"/>
                 </a:solidFill>
@@ -5201,7 +5914,7 @@
                 <a:ea typeface="Calibri" pitchFamily="34" charset="-122"/>
                 <a:cs typeface="Calibri" pitchFamily="34" charset="-120"/>
               </a:rPr>
-              <a:t>Alta leggibilità: frasi brevi, glossario, mappa, esempio svolto in testa a ogni esercizio (principi UDL)</a:t>
+              <a:t>2. Correzione ritardata: davanti all'errore, non dare la risposta — chiedi di verificare il passaggio</a:t>
             </a:r>
             <a:endParaRPr lang="en-US" sz="1500" dirty="0"/>
           </a:p>
@@ -5214,7 +5927,7 @@
               <a:buChar char="•"/>
             </a:pPr>
             <a:r>
-              <a:rPr lang="en-US" sz="1500" dirty="0">
+              <a:rPr lang="en-US" sz="1500" b="1" dirty="0">
                 <a:solidFill>
                   <a:srgbClr val="26303B"/>
                 </a:solidFill>
@@ -5222,7 +5935,7 @@
                 <a:ea typeface="Calibri" pitchFamily="34" charset="-122"/>
                 <a:cs typeface="Calibri" pitchFamily="34" charset="-120"/>
               </a:rPr>
-              <a:t>Potenziamento: problema aperto, ipotesi esplicite, aggancio interdisciplinare</a:t>
+              <a:t>3. Fading esplicito: 'riduci l'aiuto man mano che lo studente mostra padronanza; se chiede la soluzione diretta, proponi prima un ultimo tentativo'</a:t>
             </a:r>
             <a:endParaRPr lang="en-US" sz="1500" dirty="0"/>
           </a:p>
@@ -5243,7 +5956,7 @@
                 <a:ea typeface="Calibri" pitchFamily="34" charset="-122"/>
                 <a:cs typeface="Calibri" pitchFamily="34" charset="-120"/>
               </a:rPr>
-              <a:t>L'IA abbatte il costo di produrre le versioni; il docente presidia obiettivi e assegnazione</a:t>
+              <a:t>Più: linguaggio adatto all'età, registro incoraggiante, mai sarcasmo, stop se emergono dati personali</a:t>
             </a:r>
             <a:endParaRPr lang="en-US" sz="1500" dirty="0"/>
           </a:p>
@@ -5256,28 +5969,116 @@
               <a:buChar char="•"/>
             </a:pPr>
             <a:r>
-              <a:rPr lang="en-US" sz="1500" b="1" dirty="0">
-                <a:solidFill>
-                  <a:srgbClr val="F96167"/>
-                </a:solidFill>
-                <a:latin typeface="Calibri" pitchFamily="34" charset="0"/>
-                <a:ea typeface="Calibri" pitchFamily="34" charset="-122"/>
-                <a:cs typeface="Calibri" pitchFamily="34" charset="-120"/>
-              </a:rPr>
-              <a:t>PDP e PEI restano atti del consiglio di classe: MAI negli strumenti IA</a:t>
+              <a:rPr lang="en-US" sz="1500" dirty="0">
+                <a:solidFill>
+                  <a:srgbClr val="26303B"/>
+                </a:solidFill>
+                <a:latin typeface="Calibri" pitchFamily="34" charset="0"/>
+                <a:ea typeface="Calibri" pitchFamily="34" charset="-122"/>
+                <a:cs typeface="Calibri" pitchFamily="34" charset="-120"/>
+              </a:rPr>
+              <a:t>Tutto questo sono ISTRUZIONI DI SISTEMA di un Gem: si scrivono una volta, valgono per ogni conversazione</a:t>
             </a:r>
             <a:endParaRPr lang="en-US" sz="1500" dirty="0"/>
           </a:p>
-          <a:p>
-            <a:pPr marL="177800" indent="-177800">
+        </p:txBody>
+      </p:sp>
+      <p:sp>
+        <p:nvSpPr>
+          <p:cNvPr id="7" name="Shape 5"/>
+          <p:cNvSpPr/>
+          <p:nvPr/>
+        </p:nvSpPr>
+        <p:spPr>
+          <a:xfrm>
+            <a:off x="7635240" y="1600200"/>
+            <a:ext cx="3977640" cy="4480560"/>
+          </a:xfrm>
+          <a:prstGeom prst="roundRect">
+            <a:avLst>
+              <a:gd name="adj" fmla="val 2069"/>
+            </a:avLst>
+          </a:prstGeom>
+          <a:solidFill>
+            <a:srgbClr val="E9F1FB"/>
+          </a:solidFill>
+          <a:ln w="12700">
+            <a:solidFill>
+              <a:srgbClr val="E9F1FB"/>
+            </a:solidFill>
+            <a:prstDash val="solid"/>
+          </a:ln>
+        </p:spPr>
+      </p:sp>
+      <p:sp>
+        <p:nvSpPr>
+          <p:cNvPr id="8" name="Text 6"/>
+          <p:cNvSpPr/>
+          <p:nvPr/>
+        </p:nvSpPr>
+        <p:spPr>
+          <a:xfrm>
+            <a:off x="7863840" y="1764792"/>
+            <a:ext cx="3520440" cy="320040"/>
+          </a:xfrm>
+          <a:prstGeom prst="rect">
+            <a:avLst/>
+          </a:prstGeom>
+          <a:noFill/>
+          <a:ln/>
+        </p:spPr>
+        <p:txBody>
+          <a:bodyPr wrap="square" lIns="0" tIns="0" rIns="0" bIns="0" rtlCol="0" anchor="ctr"/>
+          <a:lstStyle/>
+          <a:p>
+            <a:pPr indent="0" marL="0">
+              <a:buNone/>
+            </a:pPr>
+            <a:r>
+              <a:rPr lang="en-US" sz="1450" b="1" dirty="0">
+                <a:solidFill>
+                  <a:srgbClr val="1E2761"/>
+                </a:solidFill>
+                <a:latin typeface="Cambria" pitchFamily="34" charset="0"/>
+                <a:ea typeface="Cambria" pitchFamily="34" charset="-122"/>
+                <a:cs typeface="Cambria" pitchFamily="34" charset="-120"/>
+              </a:rPr>
+              <a:t>Dal vivo</a:t>
+            </a:r>
+            <a:endParaRPr lang="en-US" sz="1450" dirty="0"/>
+          </a:p>
+        </p:txBody>
+      </p:sp>
+      <p:sp>
+        <p:nvSpPr>
+          <p:cNvPr id="9" name="Text 7"/>
+          <p:cNvSpPr/>
+          <p:nvPr/>
+        </p:nvSpPr>
+        <p:spPr>
+          <a:xfrm>
+            <a:off x="7863840" y="2130552"/>
+            <a:ext cx="3520440" cy="3794760"/>
+          </a:xfrm>
+          <a:prstGeom prst="rect">
+            <a:avLst/>
+          </a:prstGeom>
+          <a:noFill/>
+          <a:ln/>
+        </p:spPr>
+        <p:txBody>
+          <a:bodyPr wrap="square" lIns="0" tIns="0" rIns="0" bIns="0" rtlCol="0" anchor="t"/>
+          <a:lstStyle/>
+          <a:p>
+            <a:pPr marL="152400" indent="-152400">
               <a:spcAft>
-                <a:spcPts val="800"/>
+                <a:spcPts val="500"/>
               </a:spcAft>
               <a:buSzPct val="100000"/>
               <a:buChar char="•"/>
             </a:pPr>
             <a:r>
-              <a:rPr lang="en-US" sz="1500" dirty="0">
+              <a:rPr lang="en-US" sz="1250" dirty="0">
                 <a:solidFill>
                   <a:srgbClr val="26303B"/>
                 </a:solidFill>
@@ -5285,9 +6086,72 @@
                 <a:ea typeface="Calibri" pitchFamily="34" charset="-122"/>
                 <a:cs typeface="Calibri" pitchFamily="34" charset="-120"/>
               </a:rPr>
-              <a:t>L'assegnazione della versione allo studente è decisione didattica del docente: livello 1 della scala</a:t>
-            </a:r>
-            <a:endParaRPr lang="en-US" sz="1500" dirty="0"/>
+              <a:t>Demo: il Gem 'Tutor di matematica' del corso</a:t>
+            </a:r>
+            <a:endParaRPr lang="en-US" sz="1250" dirty="0"/>
+          </a:p>
+          <a:p>
+            <a:pPr marL="152400" indent="-152400">
+              <a:spcAft>
+                <a:spcPts val="500"/>
+              </a:spcAft>
+              <a:buSzPct val="100000"/>
+              <a:buChar char="•"/>
+            </a:pPr>
+            <a:r>
+              <a:rPr lang="en-US" sz="1250" dirty="0">
+                <a:solidFill>
+                  <a:srgbClr val="26303B"/>
+                </a:solidFill>
+                <a:latin typeface="Calibri" pitchFamily="34" charset="0"/>
+                <a:ea typeface="Calibri" pitchFamily="34" charset="-122"/>
+                <a:cs typeface="Calibri" pitchFamily="34" charset="-120"/>
+              </a:rPr>
+              <a:t>Gli chiedo la soluzione: non me la dà</a:t>
+            </a:r>
+            <a:endParaRPr lang="en-US" sz="1250" dirty="0"/>
+          </a:p>
+          <a:p>
+            <a:pPr marL="152400" indent="-152400">
+              <a:spcAft>
+                <a:spcPts val="500"/>
+              </a:spcAft>
+              <a:buSzPct val="100000"/>
+              <a:buChar char="•"/>
+            </a:pPr>
+            <a:r>
+              <a:rPr lang="en-US" sz="1250" dirty="0">
+                <a:solidFill>
+                  <a:srgbClr val="26303B"/>
+                </a:solidFill>
+                <a:latin typeface="Calibri" pitchFamily="34" charset="0"/>
+                <a:ea typeface="Calibri" pitchFamily="34" charset="-122"/>
+                <a:cs typeface="Calibri" pitchFamily="34" charset="-120"/>
+              </a:rPr>
+              <a:t>Sbaglio un passaggio: mi rimanda al punto critico</a:t>
+            </a:r>
+            <a:endParaRPr lang="en-US" sz="1250" dirty="0"/>
+          </a:p>
+          <a:p>
+            <a:pPr marL="152400" indent="-152400">
+              <a:spcAft>
+                <a:spcPts val="500"/>
+              </a:spcAft>
+              <a:buSzPct val="100000"/>
+              <a:buChar char="•"/>
+            </a:pPr>
+            <a:r>
+              <a:rPr lang="en-US" sz="1250" b="1" dirty="0">
+                <a:solidFill>
+                  <a:srgbClr val="26303B"/>
+                </a:solidFill>
+                <a:latin typeface="Calibri" pitchFamily="34" charset="0"/>
+                <a:ea typeface="Calibri" pitchFamily="34" charset="-122"/>
+                <a:cs typeface="Calibri" pitchFamily="34" charset="-120"/>
+              </a:rPr>
+              <a:t>Le istruzioni complete sono nei Materiali operativi</a:t>
+            </a:r>
+            <a:endParaRPr lang="en-US" sz="1250" dirty="0"/>
           </a:p>
         </p:txBody>
       </p:sp>
@@ -5420,7 +6284,7 @@
                 <a:ea typeface="Calibri" pitchFamily="34" charset="-122"/>
                 <a:cs typeface="Calibri" pitchFamily="34" charset="-120"/>
               </a:rPr>
-              <a:t>Esercitazione — mani sulla tastiera</a:t>
+              <a:t>Edu-GenAI 2 — Didattica Aumentata e Data Literacy</a:t>
             </a:r>
             <a:endParaRPr lang="en-US" sz="1100" dirty="0"/>
           </a:p>
@@ -5459,7 +6323,7 @@
                 <a:ea typeface="Cambria" pitchFamily="34" charset="-122"/>
                 <a:cs typeface="Cambria" pitchFamily="34" charset="-120"/>
               </a:rPr>
-              <a:t>Laboratorio: costruisci il tuo tutor</a:t>
+              <a:t>Personalizzare per profili, mai per persone</a:t>
             </a:r>
             <a:endParaRPr lang="en-US" sz="3000" dirty="0"/>
           </a:p>
@@ -5467,105 +6331,14 @@
       </p:sp>
       <p:sp>
         <p:nvSpPr>
-          <p:cNvPr id="6" name="Shape 4"/>
+          <p:cNvPr id="6" name="Text 4"/>
           <p:cNvSpPr/>
           <p:nvPr/>
         </p:nvSpPr>
         <p:spPr>
           <a:xfrm>
             <a:off x="822960" y="1600200"/>
-            <a:ext cx="7315200" cy="4572000"/>
-          </a:xfrm>
-          <a:prstGeom prst="roundRect">
-            <a:avLst>
-              <a:gd name="adj" fmla="val 1800"/>
-            </a:avLst>
-          </a:prstGeom>
-          <a:solidFill>
-            <a:srgbClr val="E9F1FB"/>
-          </a:solidFill>
-          <a:ln w="12700">
-            <a:solidFill>
-              <a:srgbClr val="E9F1FB"/>
-            </a:solidFill>
-            <a:prstDash val="solid"/>
-          </a:ln>
-        </p:spPr>
-      </p:sp>
-      <p:sp>
-        <p:nvSpPr>
-          <p:cNvPr id="7" name="Shape 5"/>
-          <p:cNvSpPr/>
-          <p:nvPr/>
-        </p:nvSpPr>
-        <p:spPr>
-          <a:xfrm>
-            <a:off x="1051560" y="1828800"/>
-            <a:ext cx="384048" cy="384048"/>
-          </a:xfrm>
-          <a:prstGeom prst="ellipse">
-            <a:avLst/>
-          </a:prstGeom>
-          <a:solidFill>
-            <a:srgbClr val="1E2761"/>
-          </a:solidFill>
-          <a:ln w="12700">
-            <a:solidFill>
-              <a:srgbClr val="1E2761"/>
-            </a:solidFill>
-            <a:prstDash val="solid"/>
-          </a:ln>
-        </p:spPr>
-      </p:sp>
-      <p:sp>
-        <p:nvSpPr>
-          <p:cNvPr id="8" name="Text 6"/>
-          <p:cNvSpPr/>
-          <p:nvPr/>
-        </p:nvSpPr>
-        <p:spPr>
-          <a:xfrm>
-            <a:off x="1051560" y="1828800"/>
-            <a:ext cx="384048" cy="384048"/>
-          </a:xfrm>
-          <a:prstGeom prst="rect">
-            <a:avLst/>
-          </a:prstGeom>
-          <a:noFill/>
-          <a:ln/>
-        </p:spPr>
-        <p:txBody>
-          <a:bodyPr wrap="square" lIns="0" tIns="0" rIns="0" bIns="0" rtlCol="0" anchor="ctr"/>
-          <a:lstStyle/>
-          <a:p>
-            <a:pPr algn="ctr" indent="0" marL="0">
-              <a:buNone/>
-            </a:pPr>
-            <a:r>
-              <a:rPr lang="en-US" sz="1300" b="1" dirty="0">
-                <a:solidFill>
-                  <a:srgbClr val="FFFFFF"/>
-                </a:solidFill>
-                <a:latin typeface="Cambria" pitchFamily="34" charset="0"/>
-                <a:ea typeface="Cambria" pitchFamily="34" charset="-122"/>
-                <a:cs typeface="Cambria" pitchFamily="34" charset="-120"/>
-              </a:rPr>
-              <a:t>1</a:t>
-            </a:r>
-            <a:endParaRPr lang="en-US" sz="1300" dirty="0"/>
-          </a:p>
-        </p:txBody>
-      </p:sp>
-      <p:sp>
-        <p:nvSpPr>
-          <p:cNvPr id="9" name="Text 7"/>
-          <p:cNvSpPr/>
-          <p:nvPr/>
-        </p:nvSpPr>
-        <p:spPr>
-          <a:xfrm>
-            <a:off x="1600200" y="1783080"/>
-            <a:ext cx="6309360" cy="777240"/>
+            <a:ext cx="10515600" cy="4754880"/>
           </a:xfrm>
           <a:prstGeom prst="rect">
             <a:avLst/>
@@ -5577,532 +6350,15 @@
           <a:bodyPr wrap="square" lIns="0" tIns="0" rIns="0" bIns="0" rtlCol="0" anchor="t"/>
           <a:lstStyle/>
           <a:p>
-            <a:pPr indent="0" marL="0">
-              <a:buNone/>
-            </a:pPr>
-            <a:r>
-              <a:rPr lang="en-US" sz="1350" dirty="0">
-                <a:solidFill>
-                  <a:srgbClr val="26303B"/>
-                </a:solidFill>
-                <a:latin typeface="Calibri" pitchFamily="34" charset="0"/>
-                <a:ea typeface="Calibri" pitchFamily="34" charset="-122"/>
-                <a:cs typeface="Calibri" pitchFamily="34" charset="-120"/>
-              </a:rPr>
-              <a:t>Aprite il template 'Istruzioni tutor socratico' (scheda 4 dei Materiali operativi)</a:t>
-            </a:r>
-            <a:endParaRPr lang="en-US" sz="1350" dirty="0"/>
-          </a:p>
-        </p:txBody>
-      </p:sp>
-      <p:sp>
-        <p:nvSpPr>
-          <p:cNvPr id="10" name="Shape 8"/>
-          <p:cNvSpPr/>
-          <p:nvPr/>
-        </p:nvSpPr>
-        <p:spPr>
-          <a:xfrm>
-            <a:off x="1051560" y="2670048"/>
-            <a:ext cx="384048" cy="384048"/>
-          </a:xfrm>
-          <a:prstGeom prst="ellipse">
-            <a:avLst/>
-          </a:prstGeom>
-          <a:solidFill>
-            <a:srgbClr val="1E2761"/>
-          </a:solidFill>
-          <a:ln w="12700">
-            <a:solidFill>
-              <a:srgbClr val="1E2761"/>
-            </a:solidFill>
-            <a:prstDash val="solid"/>
-          </a:ln>
-        </p:spPr>
-      </p:sp>
-      <p:sp>
-        <p:nvSpPr>
-          <p:cNvPr id="11" name="Text 9"/>
-          <p:cNvSpPr/>
-          <p:nvPr/>
-        </p:nvSpPr>
-        <p:spPr>
-          <a:xfrm>
-            <a:off x="1051560" y="2670048"/>
-            <a:ext cx="384048" cy="384048"/>
-          </a:xfrm>
-          <a:prstGeom prst="rect">
-            <a:avLst/>
-          </a:prstGeom>
-          <a:noFill/>
-          <a:ln/>
-        </p:spPr>
-        <p:txBody>
-          <a:bodyPr wrap="square" lIns="0" tIns="0" rIns="0" bIns="0" rtlCol="0" anchor="ctr"/>
-          <a:lstStyle/>
-          <a:p>
-            <a:pPr algn="ctr" indent="0" marL="0">
-              <a:buNone/>
-            </a:pPr>
-            <a:r>
-              <a:rPr lang="en-US" sz="1300" b="1" dirty="0">
-                <a:solidFill>
-                  <a:srgbClr val="FFFFFF"/>
-                </a:solidFill>
-                <a:latin typeface="Cambria" pitchFamily="34" charset="0"/>
-                <a:ea typeface="Cambria" pitchFamily="34" charset="-122"/>
-                <a:cs typeface="Cambria" pitchFamily="34" charset="-120"/>
-              </a:rPr>
-              <a:t>2</a:t>
-            </a:r>
-            <a:endParaRPr lang="en-US" sz="1300" dirty="0"/>
-          </a:p>
-        </p:txBody>
-      </p:sp>
-      <p:sp>
-        <p:nvSpPr>
-          <p:cNvPr id="12" name="Text 10"/>
-          <p:cNvSpPr/>
-          <p:nvPr/>
-        </p:nvSpPr>
-        <p:spPr>
-          <a:xfrm>
-            <a:off x="1600200" y="2624328"/>
-            <a:ext cx="6309360" cy="777240"/>
-          </a:xfrm>
-          <a:prstGeom prst="rect">
-            <a:avLst/>
-          </a:prstGeom>
-          <a:noFill/>
-          <a:ln/>
-        </p:spPr>
-        <p:txBody>
-          <a:bodyPr wrap="square" lIns="0" tIns="0" rIns="0" bIns="0" rtlCol="0" anchor="t"/>
-          <a:lstStyle/>
-          <a:p>
-            <a:pPr indent="0" marL="0">
-              <a:buNone/>
-            </a:pPr>
-            <a:r>
-              <a:rPr lang="en-US" sz="1350" dirty="0">
-                <a:solidFill>
-                  <a:srgbClr val="26303B"/>
-                </a:solidFill>
-                <a:latin typeface="Calibri" pitchFamily="34" charset="0"/>
-                <a:ea typeface="Calibri" pitchFamily="34" charset="-122"/>
-                <a:cs typeface="Calibri" pitchFamily="34" charset="-120"/>
-              </a:rPr>
-              <a:t>Adattatelo alla vostra disciplina e al caso-tipo che avete portato: quali domande-guida? Dove sbaglia tipicamente lo studente?</a:t>
-            </a:r>
-            <a:endParaRPr lang="en-US" sz="1350" dirty="0"/>
-          </a:p>
-        </p:txBody>
-      </p:sp>
-      <p:sp>
-        <p:nvSpPr>
-          <p:cNvPr id="13" name="Shape 11"/>
-          <p:cNvSpPr/>
-          <p:nvPr/>
-        </p:nvSpPr>
-        <p:spPr>
-          <a:xfrm>
-            <a:off x="1051560" y="3511296"/>
-            <a:ext cx="384048" cy="384048"/>
-          </a:xfrm>
-          <a:prstGeom prst="ellipse">
-            <a:avLst/>
-          </a:prstGeom>
-          <a:solidFill>
-            <a:srgbClr val="1E2761"/>
-          </a:solidFill>
-          <a:ln w="12700">
-            <a:solidFill>
-              <a:srgbClr val="1E2761"/>
-            </a:solidFill>
-            <a:prstDash val="solid"/>
-          </a:ln>
-        </p:spPr>
-      </p:sp>
-      <p:sp>
-        <p:nvSpPr>
-          <p:cNvPr id="14" name="Text 12"/>
-          <p:cNvSpPr/>
-          <p:nvPr/>
-        </p:nvSpPr>
-        <p:spPr>
-          <a:xfrm>
-            <a:off x="1051560" y="3511296"/>
-            <a:ext cx="384048" cy="384048"/>
-          </a:xfrm>
-          <a:prstGeom prst="rect">
-            <a:avLst/>
-          </a:prstGeom>
-          <a:noFill/>
-          <a:ln/>
-        </p:spPr>
-        <p:txBody>
-          <a:bodyPr wrap="square" lIns="0" tIns="0" rIns="0" bIns="0" rtlCol="0" anchor="ctr"/>
-          <a:lstStyle/>
-          <a:p>
-            <a:pPr algn="ctr" indent="0" marL="0">
-              <a:buNone/>
-            </a:pPr>
-            <a:r>
-              <a:rPr lang="en-US" sz="1300" b="1" dirty="0">
-                <a:solidFill>
-                  <a:srgbClr val="FFFFFF"/>
-                </a:solidFill>
-                <a:latin typeface="Cambria" pitchFamily="34" charset="0"/>
-                <a:ea typeface="Cambria" pitchFamily="34" charset="-122"/>
-                <a:cs typeface="Cambria" pitchFamily="34" charset="-120"/>
-              </a:rPr>
-              <a:t>3</a:t>
-            </a:r>
-            <a:endParaRPr lang="en-US" sz="1300" dirty="0"/>
-          </a:p>
-        </p:txBody>
-      </p:sp>
-      <p:sp>
-        <p:nvSpPr>
-          <p:cNvPr id="15" name="Text 13"/>
-          <p:cNvSpPr/>
-          <p:nvPr/>
-        </p:nvSpPr>
-        <p:spPr>
-          <a:xfrm>
-            <a:off x="1600200" y="3465576"/>
-            <a:ext cx="6309360" cy="777240"/>
-          </a:xfrm>
-          <a:prstGeom prst="rect">
-            <a:avLst/>
-          </a:prstGeom>
-          <a:noFill/>
-          <a:ln/>
-        </p:spPr>
-        <p:txBody>
-          <a:bodyPr wrap="square" lIns="0" tIns="0" rIns="0" bIns="0" rtlCol="0" anchor="t"/>
-          <a:lstStyle/>
-          <a:p>
-            <a:pPr indent="0" marL="0">
-              <a:buNone/>
-            </a:pPr>
-            <a:r>
-              <a:rPr lang="en-US" sz="1350" dirty="0">
-                <a:solidFill>
-                  <a:srgbClr val="26303B"/>
-                </a:solidFill>
-                <a:latin typeface="Calibri" pitchFamily="34" charset="0"/>
-                <a:ea typeface="Calibri" pitchFamily="34" charset="-122"/>
-                <a:cs typeface="Calibri" pitchFamily="34" charset="-120"/>
-              </a:rPr>
-              <a:t>Create il Gem e testatelo VOI: provate a farvi dare la soluzione, sbagliate apposta, osservate le risposte</a:t>
-            </a:r>
-            <a:endParaRPr lang="en-US" sz="1350" dirty="0"/>
-          </a:p>
-        </p:txBody>
-      </p:sp>
-      <p:sp>
-        <p:nvSpPr>
-          <p:cNvPr id="16" name="Shape 14"/>
-          <p:cNvSpPr/>
-          <p:nvPr/>
-        </p:nvSpPr>
-        <p:spPr>
-          <a:xfrm>
-            <a:off x="1051560" y="4352544"/>
-            <a:ext cx="384048" cy="384048"/>
-          </a:xfrm>
-          <a:prstGeom prst="ellipse">
-            <a:avLst/>
-          </a:prstGeom>
-          <a:solidFill>
-            <a:srgbClr val="1E2761"/>
-          </a:solidFill>
-          <a:ln w="12700">
-            <a:solidFill>
-              <a:srgbClr val="1E2761"/>
-            </a:solidFill>
-            <a:prstDash val="solid"/>
-          </a:ln>
-        </p:spPr>
-      </p:sp>
-      <p:sp>
-        <p:nvSpPr>
-          <p:cNvPr id="17" name="Text 15"/>
-          <p:cNvSpPr/>
-          <p:nvPr/>
-        </p:nvSpPr>
-        <p:spPr>
-          <a:xfrm>
-            <a:off x="1051560" y="4352544"/>
-            <a:ext cx="384048" cy="384048"/>
-          </a:xfrm>
-          <a:prstGeom prst="rect">
-            <a:avLst/>
-          </a:prstGeom>
-          <a:noFill/>
-          <a:ln/>
-        </p:spPr>
-        <p:txBody>
-          <a:bodyPr wrap="square" lIns="0" tIns="0" rIns="0" bIns="0" rtlCol="0" anchor="ctr"/>
-          <a:lstStyle/>
-          <a:p>
-            <a:pPr algn="ctr" indent="0" marL="0">
-              <a:buNone/>
-            </a:pPr>
-            <a:r>
-              <a:rPr lang="en-US" sz="1300" b="1" dirty="0">
-                <a:solidFill>
-                  <a:srgbClr val="FFFFFF"/>
-                </a:solidFill>
-                <a:latin typeface="Cambria" pitchFamily="34" charset="0"/>
-                <a:ea typeface="Cambria" pitchFamily="34" charset="-122"/>
-                <a:cs typeface="Cambria" pitchFamily="34" charset="-120"/>
-              </a:rPr>
-              <a:t>4</a:t>
-            </a:r>
-            <a:endParaRPr lang="en-US" sz="1300" dirty="0"/>
-          </a:p>
-        </p:txBody>
-      </p:sp>
-      <p:sp>
-        <p:nvSpPr>
-          <p:cNvPr id="18" name="Text 16"/>
-          <p:cNvSpPr/>
-          <p:nvPr/>
-        </p:nvSpPr>
-        <p:spPr>
-          <a:xfrm>
-            <a:off x="1600200" y="4306824"/>
-            <a:ext cx="6309360" cy="777240"/>
-          </a:xfrm>
-          <a:prstGeom prst="rect">
-            <a:avLst/>
-          </a:prstGeom>
-          <a:noFill/>
-          <a:ln/>
-        </p:spPr>
-        <p:txBody>
-          <a:bodyPr wrap="square" lIns="0" tIns="0" rIns="0" bIns="0" rtlCol="0" anchor="t"/>
-          <a:lstStyle/>
-          <a:p>
-            <a:pPr indent="0" marL="0">
-              <a:buNone/>
-            </a:pPr>
-            <a:r>
-              <a:rPr lang="en-US" sz="1350" dirty="0">
-                <a:solidFill>
-                  <a:srgbClr val="26303B"/>
-                </a:solidFill>
-                <a:latin typeface="Calibri" pitchFamily="34" charset="0"/>
-                <a:ea typeface="Calibri" pitchFamily="34" charset="-122"/>
-                <a:cs typeface="Calibri" pitchFamily="34" charset="-120"/>
-              </a:rPr>
-              <a:t>Scambio in coppia: testate il tutor del collega nel ruolo di studente in difficoltà — 2 feedback: uno su ciò che funziona, uno su una regola da aggiungere</a:t>
-            </a:r>
-            <a:endParaRPr lang="en-US" sz="1350" dirty="0"/>
-          </a:p>
-        </p:txBody>
-      </p:sp>
-      <p:sp>
-        <p:nvSpPr>
-          <p:cNvPr id="19" name="Shape 17"/>
-          <p:cNvSpPr/>
-          <p:nvPr/>
-        </p:nvSpPr>
-        <p:spPr>
-          <a:xfrm>
-            <a:off x="1051560" y="5193792"/>
-            <a:ext cx="384048" cy="384048"/>
-          </a:xfrm>
-          <a:prstGeom prst="ellipse">
-            <a:avLst/>
-          </a:prstGeom>
-          <a:solidFill>
-            <a:srgbClr val="1E2761"/>
-          </a:solidFill>
-          <a:ln w="12700">
-            <a:solidFill>
-              <a:srgbClr val="1E2761"/>
-            </a:solidFill>
-            <a:prstDash val="solid"/>
-          </a:ln>
-        </p:spPr>
-      </p:sp>
-      <p:sp>
-        <p:nvSpPr>
-          <p:cNvPr id="20" name="Text 18"/>
-          <p:cNvSpPr/>
-          <p:nvPr/>
-        </p:nvSpPr>
-        <p:spPr>
-          <a:xfrm>
-            <a:off x="1051560" y="5193792"/>
-            <a:ext cx="384048" cy="384048"/>
-          </a:xfrm>
-          <a:prstGeom prst="rect">
-            <a:avLst/>
-          </a:prstGeom>
-          <a:noFill/>
-          <a:ln/>
-        </p:spPr>
-        <p:txBody>
-          <a:bodyPr wrap="square" lIns="0" tIns="0" rIns="0" bIns="0" rtlCol="0" anchor="ctr"/>
-          <a:lstStyle/>
-          <a:p>
-            <a:pPr algn="ctr" indent="0" marL="0">
-              <a:buNone/>
-            </a:pPr>
-            <a:r>
-              <a:rPr lang="en-US" sz="1300" b="1" dirty="0">
-                <a:solidFill>
-                  <a:srgbClr val="FFFFFF"/>
-                </a:solidFill>
-                <a:latin typeface="Cambria" pitchFamily="34" charset="0"/>
-                <a:ea typeface="Cambria" pitchFamily="34" charset="-122"/>
-                <a:cs typeface="Cambria" pitchFamily="34" charset="-120"/>
-              </a:rPr>
-              <a:t>5</a:t>
-            </a:r>
-            <a:endParaRPr lang="en-US" sz="1300" dirty="0"/>
-          </a:p>
-        </p:txBody>
-      </p:sp>
-      <p:sp>
-        <p:nvSpPr>
-          <p:cNvPr id="21" name="Text 19"/>
-          <p:cNvSpPr/>
-          <p:nvPr/>
-        </p:nvSpPr>
-        <p:spPr>
-          <a:xfrm>
-            <a:off x="1600200" y="5148072"/>
-            <a:ext cx="6309360" cy="777240"/>
-          </a:xfrm>
-          <a:prstGeom prst="rect">
-            <a:avLst/>
-          </a:prstGeom>
-          <a:noFill/>
-          <a:ln/>
-        </p:spPr>
-        <p:txBody>
-          <a:bodyPr wrap="square" lIns="0" tIns="0" rIns="0" bIns="0" rtlCol="0" anchor="t"/>
-          <a:lstStyle/>
-          <a:p>
-            <a:pPr indent="0" marL="0">
-              <a:buNone/>
-            </a:pPr>
-            <a:r>
-              <a:rPr lang="en-US" sz="1350" dirty="0">
-                <a:solidFill>
-                  <a:srgbClr val="26303B"/>
-                </a:solidFill>
-                <a:latin typeface="Calibri" pitchFamily="34" charset="0"/>
-                <a:ea typeface="Calibri" pitchFamily="34" charset="-122"/>
-                <a:cs typeface="Calibri" pitchFamily="34" charset="-120"/>
-              </a:rPr>
-              <a:t>Annotate nel canvas della vostra UdA dove questo tutor entra nelle fasi di lavoro</a:t>
-            </a:r>
-            <a:endParaRPr lang="en-US" sz="1350" dirty="0"/>
-          </a:p>
-        </p:txBody>
-      </p:sp>
-      <p:sp>
-        <p:nvSpPr>
-          <p:cNvPr id="22" name="Shape 20"/>
-          <p:cNvSpPr/>
-          <p:nvPr/>
-        </p:nvSpPr>
-        <p:spPr>
-          <a:xfrm>
-            <a:off x="8412480" y="1600200"/>
-            <a:ext cx="3200400" cy="4572000"/>
-          </a:xfrm>
-          <a:prstGeom prst="roundRect">
-            <a:avLst>
-              <a:gd name="adj" fmla="val 2571"/>
-            </a:avLst>
-          </a:prstGeom>
-          <a:solidFill>
-            <a:srgbClr val="FFFFFF"/>
-          </a:solidFill>
-          <a:ln w="12700">
-            <a:solidFill>
-              <a:srgbClr val="FFFFFF"/>
-            </a:solidFill>
-            <a:prstDash val="solid"/>
-          </a:ln>
-        </p:spPr>
-      </p:sp>
-      <p:sp>
-        <p:nvSpPr>
-          <p:cNvPr id="23" name="Text 21"/>
-          <p:cNvSpPr/>
-          <p:nvPr/>
-        </p:nvSpPr>
-        <p:spPr>
-          <a:xfrm>
-            <a:off x="8641080" y="1764792"/>
-            <a:ext cx="2743200" cy="320040"/>
-          </a:xfrm>
-          <a:prstGeom prst="rect">
-            <a:avLst/>
-          </a:prstGeom>
-          <a:noFill/>
-          <a:ln/>
-        </p:spPr>
-        <p:txBody>
-          <a:bodyPr wrap="square" lIns="0" tIns="0" rIns="0" bIns="0" rtlCol="0" anchor="ctr"/>
-          <a:lstStyle/>
-          <a:p>
-            <a:pPr indent="0" marL="0">
-              <a:buNone/>
-            </a:pPr>
-            <a:r>
-              <a:rPr lang="en-US" sz="1450" b="1" dirty="0">
-                <a:solidFill>
-                  <a:srgbClr val="1E2761"/>
-                </a:solidFill>
-                <a:latin typeface="Cambria" pitchFamily="34" charset="0"/>
-                <a:ea typeface="Cambria" pitchFamily="34" charset="-122"/>
-                <a:cs typeface="Cambria" pitchFamily="34" charset="-120"/>
-              </a:rPr>
-              <a:t>In pratica</a:t>
-            </a:r>
-            <a:endParaRPr lang="en-US" sz="1450" dirty="0"/>
-          </a:p>
-        </p:txBody>
-      </p:sp>
-      <p:sp>
-        <p:nvSpPr>
-          <p:cNvPr id="24" name="Text 22"/>
-          <p:cNvSpPr/>
-          <p:nvPr/>
-        </p:nvSpPr>
-        <p:spPr>
-          <a:xfrm>
-            <a:off x="8641080" y="2130552"/>
-            <a:ext cx="2743200" cy="3886200"/>
-          </a:xfrm>
-          <a:prstGeom prst="rect">
-            <a:avLst/>
-          </a:prstGeom>
-          <a:noFill/>
-          <a:ln/>
-        </p:spPr>
-        <p:txBody>
-          <a:bodyPr wrap="square" lIns="0" tIns="0" rIns="0" bIns="0" rtlCol="0" anchor="t"/>
-          <a:lstStyle/>
-          <a:p>
-            <a:pPr marL="152400" indent="-152400">
+            <a:pPr marL="177800" indent="-177800">
               <a:spcAft>
-                <a:spcPts val="500"/>
+                <a:spcPts val="800"/>
               </a:spcAft>
               <a:buSzPct val="100000"/>
               <a:buChar char="•"/>
             </a:pPr>
             <a:r>
-              <a:rPr lang="en-US" sz="1250" b="1" dirty="0">
+              <a:rPr lang="en-US" sz="1500" b="1" dirty="0">
                 <a:solidFill>
                   <a:srgbClr val="26303B"/>
                 </a:solidFill>
@@ -6110,20 +6366,20 @@
                 <a:ea typeface="Calibri" pitchFamily="34" charset="-122"/>
                 <a:cs typeface="Calibri" pitchFamily="34" charset="-120"/>
               </a:rPr>
-              <a:t>55 minuti totali</a:t>
-            </a:r>
-            <a:endParaRPr lang="en-US" sz="1250" dirty="0"/>
-          </a:p>
-          <a:p>
-            <a:pPr marL="152400" indent="-152400">
+              <a:t>Si progettano VERSIONI dei materiali: alta leggibilità, base, potenziamento — profili, non elenchi di nomi</a:t>
+            </a:r>
+            <a:endParaRPr lang="en-US" sz="1500" dirty="0"/>
+          </a:p>
+          <a:p>
+            <a:pPr marL="177800" indent="-177800">
               <a:spcAft>
-                <a:spcPts val="500"/>
+                <a:spcPts val="800"/>
               </a:spcAft>
               <a:buSzPct val="100000"/>
               <a:buChar char="•"/>
             </a:pPr>
             <a:r>
-              <a:rPr lang="en-US" sz="1250" dirty="0">
+              <a:rPr lang="en-US" sz="1500" dirty="0">
                 <a:solidFill>
                   <a:srgbClr val="26303B"/>
                 </a:solidFill>
@@ -6131,20 +6387,20 @@
                 <a:ea typeface="Calibri" pitchFamily="34" charset="-122"/>
                 <a:cs typeface="Calibri" pitchFamily="34" charset="-120"/>
               </a:rPr>
-              <a:t>Individuale (30') + coppie (15')</a:t>
-            </a:r>
-            <a:endParaRPr lang="en-US" sz="1250" dirty="0"/>
-          </a:p>
-          <a:p>
-            <a:pPr marL="152400" indent="-152400">
+              <a:t>Alta leggibilità: frasi brevi, glossario, mappa, esempio svolto in testa a ogni esercizio (principi UDL)</a:t>
+            </a:r>
+            <a:endParaRPr lang="en-US" sz="1500" dirty="0"/>
+          </a:p>
+          <a:p>
+            <a:pPr marL="177800" indent="-177800">
               <a:spcAft>
-                <a:spcPts val="500"/>
+                <a:spcPts val="800"/>
               </a:spcAft>
               <a:buSzPct val="100000"/>
               <a:buChar char="•"/>
             </a:pPr>
             <a:r>
-              <a:rPr lang="en-US" sz="1250" dirty="0">
+              <a:rPr lang="en-US" sz="1500" dirty="0">
                 <a:solidFill>
                   <a:srgbClr val="26303B"/>
                 </a:solidFill>
@@ -6152,20 +6408,20 @@
                 <a:ea typeface="Calibri" pitchFamily="34" charset="-122"/>
                 <a:cs typeface="Calibri" pitchFamily="34" charset="-120"/>
               </a:rPr>
-              <a:t>Restituzione: 10 minuti</a:t>
-            </a:r>
-            <a:endParaRPr lang="en-US" sz="1250" dirty="0"/>
-          </a:p>
-          <a:p>
-            <a:pPr marL="152400" indent="-152400">
+              <a:t>Potenziamento: problema aperto, ipotesi esplicite, aggancio interdisciplinare</a:t>
+            </a:r>
+            <a:endParaRPr lang="en-US" sz="1500" dirty="0"/>
+          </a:p>
+          <a:p>
+            <a:pPr marL="177800" indent="-177800">
               <a:spcAft>
-                <a:spcPts val="500"/>
+                <a:spcPts val="800"/>
               </a:spcAft>
               <a:buSzPct val="100000"/>
               <a:buChar char="•"/>
             </a:pPr>
             <a:r>
-              <a:rPr lang="en-US" sz="1250" b="1" dirty="0">
+              <a:rPr lang="en-US" sz="1500" dirty="0">
                 <a:solidFill>
                   <a:srgbClr val="26303B"/>
                 </a:solidFill>
@@ -6173,9 +6429,51 @@
                 <a:ea typeface="Calibri" pitchFamily="34" charset="-122"/>
                 <a:cs typeface="Calibri" pitchFamily="34" charset="-120"/>
               </a:rPr>
-              <a:t>Il tutor diventa parte della UdA del project work</a:t>
-            </a:r>
-            <a:endParaRPr lang="en-US" sz="1250" dirty="0"/>
+              <a:t>L'IA abbatte il costo di produrre le versioni; il docente presidia obiettivi e assegnazione</a:t>
+            </a:r>
+            <a:endParaRPr lang="en-US" sz="1500" dirty="0"/>
+          </a:p>
+          <a:p>
+            <a:pPr marL="177800" indent="-177800">
+              <a:spcAft>
+                <a:spcPts val="800"/>
+              </a:spcAft>
+              <a:buSzPct val="100000"/>
+              <a:buChar char="•"/>
+            </a:pPr>
+            <a:r>
+              <a:rPr lang="en-US" sz="1500" b="1" dirty="0">
+                <a:solidFill>
+                  <a:srgbClr val="F96167"/>
+                </a:solidFill>
+                <a:latin typeface="Calibri" pitchFamily="34" charset="0"/>
+                <a:ea typeface="Calibri" pitchFamily="34" charset="-122"/>
+                <a:cs typeface="Calibri" pitchFamily="34" charset="-120"/>
+              </a:rPr>
+              <a:t>PDP e PEI restano atti del consiglio di classe: MAI negli strumenti IA</a:t>
+            </a:r>
+            <a:endParaRPr lang="en-US" sz="1500" dirty="0"/>
+          </a:p>
+          <a:p>
+            <a:pPr marL="177800" indent="-177800">
+              <a:spcAft>
+                <a:spcPts val="800"/>
+              </a:spcAft>
+              <a:buSzPct val="100000"/>
+              <a:buChar char="•"/>
+            </a:pPr>
+            <a:r>
+              <a:rPr lang="en-US" sz="1500" dirty="0">
+                <a:solidFill>
+                  <a:srgbClr val="26303B"/>
+                </a:solidFill>
+                <a:latin typeface="Calibri" pitchFamily="34" charset="0"/>
+                <a:ea typeface="Calibri" pitchFamily="34" charset="-122"/>
+                <a:cs typeface="Calibri" pitchFamily="34" charset="-120"/>
+              </a:rPr>
+              <a:t>L'assegnazione della versione allo studente è decisione didattica del docente: livello 1 della scala</a:t>
+            </a:r>
+            <a:endParaRPr lang="en-US" sz="1500" dirty="0"/>
           </a:p>
         </p:txBody>
       </p:sp>
@@ -6193,7 +6491,7 @@
     <p:bg>
       <p:bgPr>
         <a:solidFill>
-          <a:srgbClr val="1E2761"/>
+          <a:srgbClr val="FFFFFF"/>
         </a:solidFill>
       </p:bgPr>
     </p:bg>
@@ -6213,14 +6511,39 @@
       </p:grpSpPr>
       <p:sp>
         <p:nvSpPr>
-          <p:cNvPr id="2" name="Text 0"/>
-          <p:cNvSpPr/>
-          <p:nvPr/>
-        </p:nvSpPr>
-        <p:spPr>
-          <a:xfrm>
-            <a:off x="822960" y="731520"/>
-            <a:ext cx="10515600" cy="640080"/>
+          <p:cNvPr id="2" name="Shape 0"/>
+          <p:cNvSpPr/>
+          <p:nvPr/>
+        </p:nvSpPr>
+        <p:spPr>
+          <a:xfrm>
+            <a:off x="502920" y="384048"/>
+            <a:ext cx="566928" cy="566928"/>
+          </a:xfrm>
+          <a:prstGeom prst="ellipse">
+            <a:avLst/>
+          </a:prstGeom>
+          <a:solidFill>
+            <a:srgbClr val="1E2761"/>
+          </a:solidFill>
+          <a:ln w="12700">
+            <a:solidFill>
+              <a:srgbClr val="1E2761"/>
+            </a:solidFill>
+            <a:prstDash val="solid"/>
+          </a:ln>
+        </p:spPr>
+      </p:sp>
+      <p:sp>
+        <p:nvSpPr>
+          <p:cNvPr id="3" name="Text 1"/>
+          <p:cNvSpPr/>
+          <p:nvPr/>
+        </p:nvSpPr>
+        <p:spPr>
+          <a:xfrm>
+            <a:off x="502920" y="384048"/>
+            <a:ext cx="566928" cy="566928"/>
           </a:xfrm>
           <a:prstGeom prst="rect">
             <a:avLst/>
@@ -6232,11 +6555,11 @@
           <a:bodyPr wrap="square" lIns="0" tIns="0" rIns="0" bIns="0" rtlCol="0" anchor="ctr"/>
           <a:lstStyle/>
           <a:p>
-            <a:pPr indent="0" marL="0">
-              <a:buNone/>
-            </a:pPr>
-            <a:r>
-              <a:rPr lang="en-US" sz="3400" b="1" dirty="0">
+            <a:pPr algn="ctr" indent="0" marL="0">
+              <a:buNone/>
+            </a:pPr>
+            <a:r>
+              <a:rPr lang="en-US" sz="1800" b="1" dirty="0">
                 <a:solidFill>
                   <a:srgbClr val="FFFFFF"/>
                 </a:solidFill>
@@ -6244,22 +6567,191 @@
                 <a:ea typeface="Cambria" pitchFamily="34" charset="-122"/>
                 <a:cs typeface="Cambria" pitchFamily="34" charset="-120"/>
               </a:rPr>
-              <a:t>Per il prossimo incontro</a:t>
-            </a:r>
-            <a:endParaRPr lang="en-US" sz="3400" dirty="0"/>
-          </a:p>
-        </p:txBody>
-      </p:sp>
-      <p:sp>
-        <p:nvSpPr>
-          <p:cNvPr id="3" name="Text 1"/>
-          <p:cNvSpPr/>
-          <p:nvPr/>
-        </p:nvSpPr>
-        <p:spPr>
-          <a:xfrm>
-            <a:off x="822960" y="1645920"/>
-            <a:ext cx="10515600" cy="3108960"/>
+              <a:t>4</a:t>
+            </a:r>
+            <a:endParaRPr lang="en-US" sz="1800" dirty="0"/>
+          </a:p>
+        </p:txBody>
+      </p:sp>
+      <p:sp>
+        <p:nvSpPr>
+          <p:cNvPr id="4" name="Text 2"/>
+          <p:cNvSpPr/>
+          <p:nvPr/>
+        </p:nvSpPr>
+        <p:spPr>
+          <a:xfrm>
+            <a:off x="1234440" y="347472"/>
+            <a:ext cx="9601200" cy="274320"/>
+          </a:xfrm>
+          <a:prstGeom prst="rect">
+            <a:avLst/>
+          </a:prstGeom>
+          <a:noFill/>
+          <a:ln/>
+        </p:spPr>
+        <p:txBody>
+          <a:bodyPr wrap="square" lIns="0" tIns="0" rIns="0" bIns="0" rtlCol="0" anchor="ctr"/>
+          <a:lstStyle/>
+          <a:p>
+            <a:pPr indent="0" marL="0">
+              <a:buNone/>
+            </a:pPr>
+            <a:r>
+              <a:rPr lang="en-US" sz="1100" dirty="0">
+                <a:solidFill>
+                  <a:srgbClr val="5B6B7C"/>
+                </a:solidFill>
+                <a:latin typeface="Calibri" pitchFamily="34" charset="0"/>
+                <a:ea typeface="Calibri" pitchFamily="34" charset="-122"/>
+                <a:cs typeface="Calibri" pitchFamily="34" charset="-120"/>
+              </a:rPr>
+              <a:t>Esercitazione — mani sulla tastiera</a:t>
+            </a:r>
+            <a:endParaRPr lang="en-US" sz="1100" dirty="0"/>
+          </a:p>
+        </p:txBody>
+      </p:sp>
+      <p:sp>
+        <p:nvSpPr>
+          <p:cNvPr id="5" name="Text 3"/>
+          <p:cNvSpPr/>
+          <p:nvPr/>
+        </p:nvSpPr>
+        <p:spPr>
+          <a:xfrm>
+            <a:off x="1234440" y="566928"/>
+            <a:ext cx="10332720" cy="685800"/>
+          </a:xfrm>
+          <a:prstGeom prst="rect">
+            <a:avLst/>
+          </a:prstGeom>
+          <a:noFill/>
+          <a:ln/>
+        </p:spPr>
+        <p:txBody>
+          <a:bodyPr wrap="square" lIns="0" tIns="0" rIns="0" bIns="0" rtlCol="0" anchor="ctr"/>
+          <a:lstStyle/>
+          <a:p>
+            <a:pPr indent="0" marL="0">
+              <a:buNone/>
+            </a:pPr>
+            <a:r>
+              <a:rPr lang="en-US" sz="3000" b="1" dirty="0">
+                <a:solidFill>
+                  <a:srgbClr val="1E2761"/>
+                </a:solidFill>
+                <a:latin typeface="Cambria" pitchFamily="34" charset="0"/>
+                <a:ea typeface="Cambria" pitchFamily="34" charset="-122"/>
+                <a:cs typeface="Cambria" pitchFamily="34" charset="-120"/>
+              </a:rPr>
+              <a:t>Laboratorio: costruisci il tuo tutor</a:t>
+            </a:r>
+            <a:endParaRPr lang="en-US" sz="3000" dirty="0"/>
+          </a:p>
+        </p:txBody>
+      </p:sp>
+      <p:sp>
+        <p:nvSpPr>
+          <p:cNvPr id="6" name="Shape 4"/>
+          <p:cNvSpPr/>
+          <p:nvPr/>
+        </p:nvSpPr>
+        <p:spPr>
+          <a:xfrm>
+            <a:off x="822960" y="1600200"/>
+            <a:ext cx="7315200" cy="4572000"/>
+          </a:xfrm>
+          <a:prstGeom prst="roundRect">
+            <a:avLst>
+              <a:gd name="adj" fmla="val 1800"/>
+            </a:avLst>
+          </a:prstGeom>
+          <a:solidFill>
+            <a:srgbClr val="E9F1FB"/>
+          </a:solidFill>
+          <a:ln w="12700">
+            <a:solidFill>
+              <a:srgbClr val="E9F1FB"/>
+            </a:solidFill>
+            <a:prstDash val="solid"/>
+          </a:ln>
+        </p:spPr>
+      </p:sp>
+      <p:sp>
+        <p:nvSpPr>
+          <p:cNvPr id="7" name="Shape 5"/>
+          <p:cNvSpPr/>
+          <p:nvPr/>
+        </p:nvSpPr>
+        <p:spPr>
+          <a:xfrm>
+            <a:off x="1051560" y="1828800"/>
+            <a:ext cx="384048" cy="384048"/>
+          </a:xfrm>
+          <a:prstGeom prst="ellipse">
+            <a:avLst/>
+          </a:prstGeom>
+          <a:solidFill>
+            <a:srgbClr val="1E2761"/>
+          </a:solidFill>
+          <a:ln w="12700">
+            <a:solidFill>
+              <a:srgbClr val="1E2761"/>
+            </a:solidFill>
+            <a:prstDash val="solid"/>
+          </a:ln>
+        </p:spPr>
+      </p:sp>
+      <p:sp>
+        <p:nvSpPr>
+          <p:cNvPr id="8" name="Text 6"/>
+          <p:cNvSpPr/>
+          <p:nvPr/>
+        </p:nvSpPr>
+        <p:spPr>
+          <a:xfrm>
+            <a:off x="1051560" y="1828800"/>
+            <a:ext cx="384048" cy="384048"/>
+          </a:xfrm>
+          <a:prstGeom prst="rect">
+            <a:avLst/>
+          </a:prstGeom>
+          <a:noFill/>
+          <a:ln/>
+        </p:spPr>
+        <p:txBody>
+          <a:bodyPr wrap="square" lIns="0" tIns="0" rIns="0" bIns="0" rtlCol="0" anchor="ctr"/>
+          <a:lstStyle/>
+          <a:p>
+            <a:pPr algn="ctr" indent="0" marL="0">
+              <a:buNone/>
+            </a:pPr>
+            <a:r>
+              <a:rPr lang="en-US" sz="1300" b="1" dirty="0">
+                <a:solidFill>
+                  <a:srgbClr val="FFFFFF"/>
+                </a:solidFill>
+                <a:latin typeface="Cambria" pitchFamily="34" charset="0"/>
+                <a:ea typeface="Cambria" pitchFamily="34" charset="-122"/>
+                <a:cs typeface="Cambria" pitchFamily="34" charset="-120"/>
+              </a:rPr>
+              <a:t>1</a:t>
+            </a:r>
+            <a:endParaRPr lang="en-US" sz="1300" dirty="0"/>
+          </a:p>
+        </p:txBody>
+      </p:sp>
+      <p:sp>
+        <p:nvSpPr>
+          <p:cNvPr id="9" name="Text 7"/>
+          <p:cNvSpPr/>
+          <p:nvPr/>
+        </p:nvSpPr>
+        <p:spPr>
+          <a:xfrm>
+            <a:off x="1600200" y="1783080"/>
+            <a:ext cx="6309360" cy="777240"/>
           </a:xfrm>
           <a:prstGeom prst="rect">
             <a:avLst/>
@@ -6271,137 +6763,574 @@
           <a:bodyPr wrap="square" lIns="0" tIns="0" rIns="0" bIns="0" rtlCol="0" anchor="t"/>
           <a:lstStyle/>
           <a:p>
-            <a:pPr marL="177800" indent="-177800">
+            <a:pPr indent="0" marL="0">
+              <a:buNone/>
+            </a:pPr>
+            <a:r>
+              <a:rPr lang="en-US" sz="1350" dirty="0">
+                <a:solidFill>
+                  <a:srgbClr val="26303B"/>
+                </a:solidFill>
+                <a:latin typeface="Calibri" pitchFamily="34" charset="0"/>
+                <a:ea typeface="Calibri" pitchFamily="34" charset="-122"/>
+                <a:cs typeface="Calibri" pitchFamily="34" charset="-120"/>
+              </a:rPr>
+              <a:t>Aprite il template 'Istruzioni tutor socratico' (scheda 4 dei Materiali operativi)</a:t>
+            </a:r>
+            <a:endParaRPr lang="en-US" sz="1350" dirty="0"/>
+          </a:p>
+        </p:txBody>
+      </p:sp>
+      <p:sp>
+        <p:nvSpPr>
+          <p:cNvPr id="10" name="Shape 8"/>
+          <p:cNvSpPr/>
+          <p:nvPr/>
+        </p:nvSpPr>
+        <p:spPr>
+          <a:xfrm>
+            <a:off x="1051560" y="2670048"/>
+            <a:ext cx="384048" cy="384048"/>
+          </a:xfrm>
+          <a:prstGeom prst="ellipse">
+            <a:avLst/>
+          </a:prstGeom>
+          <a:solidFill>
+            <a:srgbClr val="1E2761"/>
+          </a:solidFill>
+          <a:ln w="12700">
+            <a:solidFill>
+              <a:srgbClr val="1E2761"/>
+            </a:solidFill>
+            <a:prstDash val="solid"/>
+          </a:ln>
+        </p:spPr>
+      </p:sp>
+      <p:sp>
+        <p:nvSpPr>
+          <p:cNvPr id="11" name="Text 9"/>
+          <p:cNvSpPr/>
+          <p:nvPr/>
+        </p:nvSpPr>
+        <p:spPr>
+          <a:xfrm>
+            <a:off x="1051560" y="2670048"/>
+            <a:ext cx="384048" cy="384048"/>
+          </a:xfrm>
+          <a:prstGeom prst="rect">
+            <a:avLst/>
+          </a:prstGeom>
+          <a:noFill/>
+          <a:ln/>
+        </p:spPr>
+        <p:txBody>
+          <a:bodyPr wrap="square" lIns="0" tIns="0" rIns="0" bIns="0" rtlCol="0" anchor="ctr"/>
+          <a:lstStyle/>
+          <a:p>
+            <a:pPr algn="ctr" indent="0" marL="0">
+              <a:buNone/>
+            </a:pPr>
+            <a:r>
+              <a:rPr lang="en-US" sz="1300" b="1" dirty="0">
+                <a:solidFill>
+                  <a:srgbClr val="FFFFFF"/>
+                </a:solidFill>
+                <a:latin typeface="Cambria" pitchFamily="34" charset="0"/>
+                <a:ea typeface="Cambria" pitchFamily="34" charset="-122"/>
+                <a:cs typeface="Cambria" pitchFamily="34" charset="-120"/>
+              </a:rPr>
+              <a:t>2</a:t>
+            </a:r>
+            <a:endParaRPr lang="en-US" sz="1300" dirty="0"/>
+          </a:p>
+        </p:txBody>
+      </p:sp>
+      <p:sp>
+        <p:nvSpPr>
+          <p:cNvPr id="12" name="Text 10"/>
+          <p:cNvSpPr/>
+          <p:nvPr/>
+        </p:nvSpPr>
+        <p:spPr>
+          <a:xfrm>
+            <a:off x="1600200" y="2624328"/>
+            <a:ext cx="6309360" cy="777240"/>
+          </a:xfrm>
+          <a:prstGeom prst="rect">
+            <a:avLst/>
+          </a:prstGeom>
+          <a:noFill/>
+          <a:ln/>
+        </p:spPr>
+        <p:txBody>
+          <a:bodyPr wrap="square" lIns="0" tIns="0" rIns="0" bIns="0" rtlCol="0" anchor="t"/>
+          <a:lstStyle/>
+          <a:p>
+            <a:pPr indent="0" marL="0">
+              <a:buNone/>
+            </a:pPr>
+            <a:r>
+              <a:rPr lang="en-US" sz="1350" dirty="0">
+                <a:solidFill>
+                  <a:srgbClr val="26303B"/>
+                </a:solidFill>
+                <a:latin typeface="Calibri" pitchFamily="34" charset="0"/>
+                <a:ea typeface="Calibri" pitchFamily="34" charset="-122"/>
+                <a:cs typeface="Calibri" pitchFamily="34" charset="-120"/>
+              </a:rPr>
+              <a:t>Adattatelo alla vostra disciplina e al caso-tipo che avete portato: quali domande-guida? Dove sbaglia tipicamente lo studente?</a:t>
+            </a:r>
+            <a:endParaRPr lang="en-US" sz="1350" dirty="0"/>
+          </a:p>
+        </p:txBody>
+      </p:sp>
+      <p:sp>
+        <p:nvSpPr>
+          <p:cNvPr id="13" name="Shape 11"/>
+          <p:cNvSpPr/>
+          <p:nvPr/>
+        </p:nvSpPr>
+        <p:spPr>
+          <a:xfrm>
+            <a:off x="1051560" y="3511296"/>
+            <a:ext cx="384048" cy="384048"/>
+          </a:xfrm>
+          <a:prstGeom prst="ellipse">
+            <a:avLst/>
+          </a:prstGeom>
+          <a:solidFill>
+            <a:srgbClr val="1E2761"/>
+          </a:solidFill>
+          <a:ln w="12700">
+            <a:solidFill>
+              <a:srgbClr val="1E2761"/>
+            </a:solidFill>
+            <a:prstDash val="solid"/>
+          </a:ln>
+        </p:spPr>
+      </p:sp>
+      <p:sp>
+        <p:nvSpPr>
+          <p:cNvPr id="14" name="Text 12"/>
+          <p:cNvSpPr/>
+          <p:nvPr/>
+        </p:nvSpPr>
+        <p:spPr>
+          <a:xfrm>
+            <a:off x="1051560" y="3511296"/>
+            <a:ext cx="384048" cy="384048"/>
+          </a:xfrm>
+          <a:prstGeom prst="rect">
+            <a:avLst/>
+          </a:prstGeom>
+          <a:noFill/>
+          <a:ln/>
+        </p:spPr>
+        <p:txBody>
+          <a:bodyPr wrap="square" lIns="0" tIns="0" rIns="0" bIns="0" rtlCol="0" anchor="ctr"/>
+          <a:lstStyle/>
+          <a:p>
+            <a:pPr algn="ctr" indent="0" marL="0">
+              <a:buNone/>
+            </a:pPr>
+            <a:r>
+              <a:rPr lang="en-US" sz="1300" b="1" dirty="0">
+                <a:solidFill>
+                  <a:srgbClr val="FFFFFF"/>
+                </a:solidFill>
+                <a:latin typeface="Cambria" pitchFamily="34" charset="0"/>
+                <a:ea typeface="Cambria" pitchFamily="34" charset="-122"/>
+                <a:cs typeface="Cambria" pitchFamily="34" charset="-120"/>
+              </a:rPr>
+              <a:t>3</a:t>
+            </a:r>
+            <a:endParaRPr lang="en-US" sz="1300" dirty="0"/>
+          </a:p>
+        </p:txBody>
+      </p:sp>
+      <p:sp>
+        <p:nvSpPr>
+          <p:cNvPr id="15" name="Text 13"/>
+          <p:cNvSpPr/>
+          <p:nvPr/>
+        </p:nvSpPr>
+        <p:spPr>
+          <a:xfrm>
+            <a:off x="1600200" y="3465576"/>
+            <a:ext cx="6309360" cy="777240"/>
+          </a:xfrm>
+          <a:prstGeom prst="rect">
+            <a:avLst/>
+          </a:prstGeom>
+          <a:noFill/>
+          <a:ln/>
+        </p:spPr>
+        <p:txBody>
+          <a:bodyPr wrap="square" lIns="0" tIns="0" rIns="0" bIns="0" rtlCol="0" anchor="t"/>
+          <a:lstStyle/>
+          <a:p>
+            <a:pPr indent="0" marL="0">
+              <a:buNone/>
+            </a:pPr>
+            <a:r>
+              <a:rPr lang="en-US" sz="1350" dirty="0">
+                <a:solidFill>
+                  <a:srgbClr val="26303B"/>
+                </a:solidFill>
+                <a:latin typeface="Calibri" pitchFamily="34" charset="0"/>
+                <a:ea typeface="Calibri" pitchFamily="34" charset="-122"/>
+                <a:cs typeface="Calibri" pitchFamily="34" charset="-120"/>
+              </a:rPr>
+              <a:t>Create il Gem e testatelo VOI: provate a farvi dare la soluzione, sbagliate apposta, osservate le risposte</a:t>
+            </a:r>
+            <a:endParaRPr lang="en-US" sz="1350" dirty="0"/>
+          </a:p>
+        </p:txBody>
+      </p:sp>
+      <p:sp>
+        <p:nvSpPr>
+          <p:cNvPr id="16" name="Shape 14"/>
+          <p:cNvSpPr/>
+          <p:nvPr/>
+        </p:nvSpPr>
+        <p:spPr>
+          <a:xfrm>
+            <a:off x="1051560" y="4352544"/>
+            <a:ext cx="384048" cy="384048"/>
+          </a:xfrm>
+          <a:prstGeom prst="ellipse">
+            <a:avLst/>
+          </a:prstGeom>
+          <a:solidFill>
+            <a:srgbClr val="1E2761"/>
+          </a:solidFill>
+          <a:ln w="12700">
+            <a:solidFill>
+              <a:srgbClr val="1E2761"/>
+            </a:solidFill>
+            <a:prstDash val="solid"/>
+          </a:ln>
+        </p:spPr>
+      </p:sp>
+      <p:sp>
+        <p:nvSpPr>
+          <p:cNvPr id="17" name="Text 15"/>
+          <p:cNvSpPr/>
+          <p:nvPr/>
+        </p:nvSpPr>
+        <p:spPr>
+          <a:xfrm>
+            <a:off x="1051560" y="4352544"/>
+            <a:ext cx="384048" cy="384048"/>
+          </a:xfrm>
+          <a:prstGeom prst="rect">
+            <a:avLst/>
+          </a:prstGeom>
+          <a:noFill/>
+          <a:ln/>
+        </p:spPr>
+        <p:txBody>
+          <a:bodyPr wrap="square" lIns="0" tIns="0" rIns="0" bIns="0" rtlCol="0" anchor="ctr"/>
+          <a:lstStyle/>
+          <a:p>
+            <a:pPr algn="ctr" indent="0" marL="0">
+              <a:buNone/>
+            </a:pPr>
+            <a:r>
+              <a:rPr lang="en-US" sz="1300" b="1" dirty="0">
+                <a:solidFill>
+                  <a:srgbClr val="FFFFFF"/>
+                </a:solidFill>
+                <a:latin typeface="Cambria" pitchFamily="34" charset="0"/>
+                <a:ea typeface="Cambria" pitchFamily="34" charset="-122"/>
+                <a:cs typeface="Cambria" pitchFamily="34" charset="-120"/>
+              </a:rPr>
+              <a:t>4</a:t>
+            </a:r>
+            <a:endParaRPr lang="en-US" sz="1300" dirty="0"/>
+          </a:p>
+        </p:txBody>
+      </p:sp>
+      <p:sp>
+        <p:nvSpPr>
+          <p:cNvPr id="18" name="Text 16"/>
+          <p:cNvSpPr/>
+          <p:nvPr/>
+        </p:nvSpPr>
+        <p:spPr>
+          <a:xfrm>
+            <a:off x="1600200" y="4306824"/>
+            <a:ext cx="6309360" cy="777240"/>
+          </a:xfrm>
+          <a:prstGeom prst="rect">
+            <a:avLst/>
+          </a:prstGeom>
+          <a:noFill/>
+          <a:ln/>
+        </p:spPr>
+        <p:txBody>
+          <a:bodyPr wrap="square" lIns="0" tIns="0" rIns="0" bIns="0" rtlCol="0" anchor="t"/>
+          <a:lstStyle/>
+          <a:p>
+            <a:pPr indent="0" marL="0">
+              <a:buNone/>
+            </a:pPr>
+            <a:r>
+              <a:rPr lang="en-US" sz="1350" dirty="0">
+                <a:solidFill>
+                  <a:srgbClr val="26303B"/>
+                </a:solidFill>
+                <a:latin typeface="Calibri" pitchFamily="34" charset="0"/>
+                <a:ea typeface="Calibri" pitchFamily="34" charset="-122"/>
+                <a:cs typeface="Calibri" pitchFamily="34" charset="-120"/>
+              </a:rPr>
+              <a:t>Scambio in coppia: testate il tutor del collega nel ruolo di studente in difficoltà — 2 feedback: uno su ciò che funziona, uno su una regola da aggiungere</a:t>
+            </a:r>
+            <a:endParaRPr lang="en-US" sz="1350" dirty="0"/>
+          </a:p>
+        </p:txBody>
+      </p:sp>
+      <p:sp>
+        <p:nvSpPr>
+          <p:cNvPr id="19" name="Shape 17"/>
+          <p:cNvSpPr/>
+          <p:nvPr/>
+        </p:nvSpPr>
+        <p:spPr>
+          <a:xfrm>
+            <a:off x="1051560" y="5193792"/>
+            <a:ext cx="384048" cy="384048"/>
+          </a:xfrm>
+          <a:prstGeom prst="ellipse">
+            <a:avLst/>
+          </a:prstGeom>
+          <a:solidFill>
+            <a:srgbClr val="1E2761"/>
+          </a:solidFill>
+          <a:ln w="12700">
+            <a:solidFill>
+              <a:srgbClr val="1E2761"/>
+            </a:solidFill>
+            <a:prstDash val="solid"/>
+          </a:ln>
+        </p:spPr>
+      </p:sp>
+      <p:sp>
+        <p:nvSpPr>
+          <p:cNvPr id="20" name="Text 18"/>
+          <p:cNvSpPr/>
+          <p:nvPr/>
+        </p:nvSpPr>
+        <p:spPr>
+          <a:xfrm>
+            <a:off x="1051560" y="5193792"/>
+            <a:ext cx="384048" cy="384048"/>
+          </a:xfrm>
+          <a:prstGeom prst="rect">
+            <a:avLst/>
+          </a:prstGeom>
+          <a:noFill/>
+          <a:ln/>
+        </p:spPr>
+        <p:txBody>
+          <a:bodyPr wrap="square" lIns="0" tIns="0" rIns="0" bIns="0" rtlCol="0" anchor="ctr"/>
+          <a:lstStyle/>
+          <a:p>
+            <a:pPr algn="ctr" indent="0" marL="0">
+              <a:buNone/>
+            </a:pPr>
+            <a:r>
+              <a:rPr lang="en-US" sz="1300" b="1" dirty="0">
+                <a:solidFill>
+                  <a:srgbClr val="FFFFFF"/>
+                </a:solidFill>
+                <a:latin typeface="Cambria" pitchFamily="34" charset="0"/>
+                <a:ea typeface="Cambria" pitchFamily="34" charset="-122"/>
+                <a:cs typeface="Cambria" pitchFamily="34" charset="-120"/>
+              </a:rPr>
+              <a:t>5</a:t>
+            </a:r>
+            <a:endParaRPr lang="en-US" sz="1300" dirty="0"/>
+          </a:p>
+        </p:txBody>
+      </p:sp>
+      <p:sp>
+        <p:nvSpPr>
+          <p:cNvPr id="21" name="Text 19"/>
+          <p:cNvSpPr/>
+          <p:nvPr/>
+        </p:nvSpPr>
+        <p:spPr>
+          <a:xfrm>
+            <a:off x="1600200" y="5148072"/>
+            <a:ext cx="6309360" cy="777240"/>
+          </a:xfrm>
+          <a:prstGeom prst="rect">
+            <a:avLst/>
+          </a:prstGeom>
+          <a:noFill/>
+          <a:ln/>
+        </p:spPr>
+        <p:txBody>
+          <a:bodyPr wrap="square" lIns="0" tIns="0" rIns="0" bIns="0" rtlCol="0" anchor="t"/>
+          <a:lstStyle/>
+          <a:p>
+            <a:pPr indent="0" marL="0">
+              <a:buNone/>
+            </a:pPr>
+            <a:r>
+              <a:rPr lang="en-US" sz="1350" dirty="0">
+                <a:solidFill>
+                  <a:srgbClr val="26303B"/>
+                </a:solidFill>
+                <a:latin typeface="Calibri" pitchFamily="34" charset="0"/>
+                <a:ea typeface="Calibri" pitchFamily="34" charset="-122"/>
+                <a:cs typeface="Calibri" pitchFamily="34" charset="-120"/>
+              </a:rPr>
+              <a:t>Annotate nel canvas della vostra UdA dove questo tutor entra nelle fasi di lavoro</a:t>
+            </a:r>
+            <a:endParaRPr lang="en-US" sz="1350" dirty="0"/>
+          </a:p>
+        </p:txBody>
+      </p:sp>
+      <p:sp>
+        <p:nvSpPr>
+          <p:cNvPr id="22" name="Shape 20"/>
+          <p:cNvSpPr/>
+          <p:nvPr/>
+        </p:nvSpPr>
+        <p:spPr>
+          <a:xfrm>
+            <a:off x="8412480" y="1600200"/>
+            <a:ext cx="3200400" cy="4572000"/>
+          </a:xfrm>
+          <a:prstGeom prst="roundRect">
+            <a:avLst>
+              <a:gd name="adj" fmla="val 2571"/>
+            </a:avLst>
+          </a:prstGeom>
+          <a:solidFill>
+            <a:srgbClr val="FFFFFF"/>
+          </a:solidFill>
+          <a:ln w="12700">
+            <a:solidFill>
+              <a:srgbClr val="FFFFFF"/>
+            </a:solidFill>
+            <a:prstDash val="solid"/>
+          </a:ln>
+        </p:spPr>
+      </p:sp>
+      <p:sp>
+        <p:nvSpPr>
+          <p:cNvPr id="23" name="Text 21"/>
+          <p:cNvSpPr/>
+          <p:nvPr/>
+        </p:nvSpPr>
+        <p:spPr>
+          <a:xfrm>
+            <a:off x="8641080" y="1764792"/>
+            <a:ext cx="2743200" cy="320040"/>
+          </a:xfrm>
+          <a:prstGeom prst="rect">
+            <a:avLst/>
+          </a:prstGeom>
+          <a:noFill/>
+          <a:ln/>
+        </p:spPr>
+        <p:txBody>
+          <a:bodyPr wrap="square" lIns="0" tIns="0" rIns="0" bIns="0" rtlCol="0" anchor="ctr"/>
+          <a:lstStyle/>
+          <a:p>
+            <a:pPr indent="0" marL="0">
+              <a:buNone/>
+            </a:pPr>
+            <a:r>
+              <a:rPr lang="en-US" sz="1450" b="1" dirty="0">
+                <a:solidFill>
+                  <a:srgbClr val="1E2761"/>
+                </a:solidFill>
+                <a:latin typeface="Cambria" pitchFamily="34" charset="0"/>
+                <a:ea typeface="Cambria" pitchFamily="34" charset="-122"/>
+                <a:cs typeface="Cambria" pitchFamily="34" charset="-120"/>
+              </a:rPr>
+              <a:t>In pratica</a:t>
+            </a:r>
+            <a:endParaRPr lang="en-US" sz="1450" dirty="0"/>
+          </a:p>
+        </p:txBody>
+      </p:sp>
+      <p:sp>
+        <p:nvSpPr>
+          <p:cNvPr id="24" name="Text 22"/>
+          <p:cNvSpPr/>
+          <p:nvPr/>
+        </p:nvSpPr>
+        <p:spPr>
+          <a:xfrm>
+            <a:off x="8641080" y="2130552"/>
+            <a:ext cx="2743200" cy="3886200"/>
+          </a:xfrm>
+          <a:prstGeom prst="rect">
+            <a:avLst/>
+          </a:prstGeom>
+          <a:noFill/>
+          <a:ln/>
+        </p:spPr>
+        <p:txBody>
+          <a:bodyPr wrap="square" lIns="0" tIns="0" rIns="0" bIns="0" rtlCol="0" anchor="t"/>
+          <a:lstStyle/>
+          <a:p>
+            <a:pPr marL="152400" indent="-152400">
               <a:spcAft>
-                <a:spcPts val="1000"/>
+                <a:spcPts val="500"/>
               </a:spcAft>
               <a:buSzPct val="100000"/>
               <a:buChar char="•"/>
             </a:pPr>
             <a:r>
-              <a:rPr lang="en-US" sz="1600" dirty="0">
-                <a:solidFill>
-                  <a:srgbClr val="FFFFFF"/>
-                </a:solidFill>
-                <a:latin typeface="Calibri" pitchFamily="34" charset="0"/>
-                <a:ea typeface="Calibri" pitchFamily="34" charset="-122"/>
-                <a:cs typeface="Calibri" pitchFamily="34" charset="-120"/>
-              </a:rPr>
-              <a:t>Rifinire le istruzioni del vostro tutor e collegarlo alle fasi della UdA nel canvas</a:t>
-            </a:r>
-            <a:endParaRPr lang="en-US" sz="1600" dirty="0"/>
-          </a:p>
-          <a:p>
-            <a:pPr marL="177800" indent="-177800">
+              <a:rPr lang="en-US" sz="1250" b="1" dirty="0">
+                <a:solidFill>
+                  <a:srgbClr val="26303B"/>
+                </a:solidFill>
+                <a:latin typeface="Calibri" pitchFamily="34" charset="0"/>
+                <a:ea typeface="Calibri" pitchFamily="34" charset="-122"/>
+                <a:cs typeface="Calibri" pitchFamily="34" charset="-120"/>
+              </a:rPr>
+              <a:t>55 minuti totali</a:t>
+            </a:r>
+            <a:endParaRPr lang="en-US" sz="1250" dirty="0"/>
+          </a:p>
+          <a:p>
+            <a:pPr marL="152400" indent="-152400">
               <a:spcAft>
-                <a:spcPts val="1000"/>
+                <a:spcPts val="500"/>
               </a:spcAft>
               <a:buSzPct val="100000"/>
               <a:buChar char="•"/>
             </a:pPr>
             <a:r>
-              <a:rPr lang="en-US" sz="1600" dirty="0">
-                <a:solidFill>
-                  <a:srgbClr val="FFFFFF"/>
-                </a:solidFill>
-                <a:latin typeface="Calibri" pitchFamily="34" charset="0"/>
-                <a:ea typeface="Calibri" pitchFamily="34" charset="-122"/>
-                <a:cs typeface="Calibri" pitchFamily="34" charset="-120"/>
-              </a:rPr>
-              <a:t>Portare martedì: un elaborato di studente ANONIMIZZATO (senza nome né riferimenti) su cui lavorare con le rubriche</a:t>
-            </a:r>
-            <a:endParaRPr lang="en-US" sz="1600" dirty="0"/>
-          </a:p>
-          <a:p>
-            <a:pPr marL="177800" indent="-177800">
+              <a:rPr lang="en-US" sz="1250" dirty="0">
+                <a:solidFill>
+                  <a:srgbClr val="26303B"/>
+                </a:solidFill>
+                <a:latin typeface="Calibri" pitchFamily="34" charset="0"/>
+                <a:ea typeface="Calibri" pitchFamily="34" charset="-122"/>
+                <a:cs typeface="Calibri" pitchFamily="34" charset="-120"/>
+              </a:rPr>
+              <a:t>Individuale (30') + coppie (15')</a:t>
+            </a:r>
+            <a:endParaRPr lang="en-US" sz="1250" dirty="0"/>
+          </a:p>
+          <a:p>
+            <a:pPr marL="152400" indent="-152400">
               <a:spcAft>
-                <a:spcPts val="1000"/>
+                <a:spcPts val="500"/>
               </a:spcAft>
               <a:buSzPct val="100000"/>
               <a:buChar char="•"/>
             </a:pPr>
             <a:r>
-              <a:rPr lang="en-US" sz="1600" dirty="0">
-                <a:solidFill>
-                  <a:srgbClr val="FFFFFF"/>
-                </a:solidFill>
-                <a:latin typeface="Calibri" pitchFamily="34" charset="0"/>
-                <a:ea typeface="Calibri" pitchFamily="34" charset="-122"/>
-                <a:cs typeface="Calibri" pitchFamily="34" charset="-120"/>
-              </a:rPr>
-              <a:t>Facoltativo: Bloom, 'The 2 Sigma Problem' (4 pagine, invecchiato benissimo)</a:t>
-            </a:r>
-            <a:endParaRPr lang="en-US" sz="1600" dirty="0"/>
-          </a:p>
-        </p:txBody>
-      </p:sp>
-      <p:sp>
-        <p:nvSpPr>
-          <p:cNvPr id="4" name="Shape 2"/>
-          <p:cNvSpPr/>
-          <p:nvPr/>
-        </p:nvSpPr>
-        <p:spPr>
-          <a:xfrm>
-            <a:off x="822960" y="4937760"/>
-            <a:ext cx="10515600" cy="1188720"/>
-          </a:xfrm>
-          <a:prstGeom prst="roundRect">
-            <a:avLst>
-              <a:gd name="adj" fmla="val 6923"/>
-            </a:avLst>
-          </a:prstGeom>
-          <a:solidFill>
-            <a:srgbClr val="CADCFC"/>
-          </a:solidFill>
-          <a:ln w="12700">
-            <a:solidFill>
-              <a:srgbClr val="CADCFC"/>
-            </a:solidFill>
-            <a:prstDash val="solid"/>
-          </a:ln>
-        </p:spPr>
-      </p:sp>
-      <p:sp>
-        <p:nvSpPr>
-          <p:cNvPr id="5" name="Text 3"/>
-          <p:cNvSpPr/>
-          <p:nvPr/>
-        </p:nvSpPr>
-        <p:spPr>
-          <a:xfrm>
-            <a:off x="1097280" y="4937760"/>
-            <a:ext cx="9966960" cy="1188720"/>
-          </a:xfrm>
-          <a:prstGeom prst="rect">
-            <a:avLst/>
-          </a:prstGeom>
-          <a:noFill/>
-          <a:ln/>
-        </p:spPr>
-        <p:txBody>
-          <a:bodyPr wrap="square" lIns="0" tIns="0" rIns="0" bIns="0" rtlCol="0" anchor="ctr"/>
-          <a:lstStyle/>
-          <a:p>
-            <a:pPr indent="0" marL="0">
-              <a:buNone/>
-            </a:pPr>
-            <a:r>
-              <a:rPr lang="en-US" sz="1600" b="1" dirty="0">
-                <a:solidFill>
-                  <a:srgbClr val="1E2761"/>
-                </a:solidFill>
-                <a:latin typeface="Cambria" pitchFamily="34" charset="0"/>
-                <a:ea typeface="Cambria" pitchFamily="34" charset="-122"/>
-                <a:cs typeface="Cambria" pitchFamily="34" charset="-120"/>
-              </a:rPr>
-              <a:t>Incontro 5 — martedì 15 settembre:  </a:t>
-            </a:r>
-            <a:pPr indent="0" marL="0">
-              <a:buNone/>
-            </a:pPr>
-            <a:r>
-              <a:rPr lang="en-US" sz="1400" dirty="0">
+              <a:rPr lang="en-US" sz="1250" dirty="0">
                 <a:solidFill>
                   <a:srgbClr val="26303B"/>
                 </a:solidFill>
@@ -6409,9 +7338,30 @@
                 <a:ea typeface="Calibri" pitchFamily="34" charset="-122"/>
                 <a:cs typeface="Calibri" pitchFamily="34" charset="-120"/>
               </a:rPr>
-              <a:t>Data literacy e valutazione assistita: bias, allucinazioni, rubriche co-progettate — e chi valuta resta chiaro.</a:t>
-            </a:r>
-            <a:endParaRPr lang="en-US" sz="1600" dirty="0"/>
+              <a:t>Restituzione: 10 minuti</a:t>
+            </a:r>
+            <a:endParaRPr lang="en-US" sz="1250" dirty="0"/>
+          </a:p>
+          <a:p>
+            <a:pPr marL="152400" indent="-152400">
+              <a:spcAft>
+                <a:spcPts val="500"/>
+              </a:spcAft>
+              <a:buSzPct val="100000"/>
+              <a:buChar char="•"/>
+            </a:pPr>
+            <a:r>
+              <a:rPr lang="en-US" sz="1250" b="1" dirty="0">
+                <a:solidFill>
+                  <a:srgbClr val="26303B"/>
+                </a:solidFill>
+                <a:latin typeface="Calibri" pitchFamily="34" charset="0"/>
+                <a:ea typeface="Calibri" pitchFamily="34" charset="-122"/>
+                <a:cs typeface="Calibri" pitchFamily="34" charset="-120"/>
+              </a:rPr>
+              <a:t>Il tutor diventa parte della UdA del project work</a:t>
+            </a:r>
+            <a:endParaRPr lang="en-US" sz="1250" dirty="0"/>
           </a:p>
         </p:txBody>
       </p:sp>
